--- a/outputs/presentation/fab-common-platform-options.pptx
+++ b/outputs/presentation/fab-common-platform-options.pptx
@@ -29837,33 +29837,1298 @@
           </a:p>
         </p:txBody>
       </p:sp>
-      <p:pic>
-        <p:nvPicPr>
-          <p:cNvPr id="13" name="Picture 12" descr="c3_space.png"/>
-          <p:cNvPicPr>
-            <a:picLocks noChangeAspect="1"/>
-          </p:cNvPicPr>
-          <p:nvPr/>
-        </p:nvPicPr>
-        <p:blipFill>
-          <a:blip r:embed="rId2"/>
-          <a:stretch>
-            <a:fillRect/>
-          </a:stretch>
-        </p:blipFill>
-        <p:spPr>
-          <a:xfrm>
-            <a:off x="1161288" y="3364992"/>
-            <a:ext cx="4846320" cy="1645919"/>
-          </a:xfrm>
-          <a:prstGeom prst="rect">
-            <a:avLst/>
-          </a:prstGeom>
-        </p:spPr>
-      </p:pic>
-      <p:sp>
-        <p:nvSpPr>
-          <p:cNvPr id="14" name="Rectangle 13"/>
+      <p:grpSp>
+        <p:nvGrpSpPr>
+          <p:cNvPr id="13" name="그림 1 공간 효율성 (도형)"/>
+          <p:cNvGrpSpPr/>
+          <p:nvPr/>
+        </p:nvGrpSpPr>
+        <p:grpSpPr>
+          <a:xfrm>
+            <a:off x="1197864" y="3355848"/>
+            <a:ext cx="4873752" cy="1600200"/>
+            <a:chOff x="1197864" y="3355848"/>
+            <a:chExt cx="4873752" cy="1600200"/>
+          </a:xfrm>
+        </p:grpSpPr>
+        <p:sp>
+          <p:nvSpPr>
+            <p:cNvPr id="14" name="Rectangle 13"/>
+            <p:cNvSpPr/>
+            <p:nvPr/>
+          </p:nvSpPr>
+          <p:spPr>
+            <a:xfrm>
+              <a:off x="1197864" y="3657600"/>
+              <a:ext cx="2249424" cy="1298448"/>
+            </a:xfrm>
+            <a:prstGeom prst="rect">
+              <a:avLst/>
+            </a:prstGeom>
+            <a:solidFill>
+              <a:srgbClr val="FFFFFF"/>
+            </a:solidFill>
+            <a:ln w="12700">
+              <a:solidFill>
+                <a:srgbClr val="8A8A8A"/>
+              </a:solidFill>
+            </a:ln>
+            <a:effectLst/>
+          </p:spPr>
+          <p:txBody>
+            <a:bodyPr rtlCol="0" anchor="ctr"/>
+            <a:lstStyle/>
+            <a:p>
+              <a:pPr algn="ctr"/>
+            </a:p>
+          </p:txBody>
+        </p:sp>
+        <p:cxnSp>
+          <p:nvCxnSpPr>
+            <p:cNvPr id="15" name="Connector 14"/>
+            <p:cNvCxnSpPr/>
+            <p:nvPr/>
+          </p:nvCxnSpPr>
+          <p:spPr>
+            <a:xfrm flipV="1">
+              <a:off x="2322576" y="3657600"/>
+              <a:ext cx="0" cy="1298448"/>
+            </a:xfrm>
+            <a:prstGeom prst="line">
+              <a:avLst/>
+            </a:prstGeom>
+            <a:ln w="30480">
+              <a:solidFill>
+                <a:srgbClr val="555555"/>
+              </a:solidFill>
+            </a:ln>
+          </p:spPr>
+        </p:cxnSp>
+        <p:sp>
+          <p:nvSpPr>
+            <p:cNvPr id="16" name="Rounded Rectangle 15"/>
+            <p:cNvSpPr/>
+            <p:nvPr/>
+          </p:nvSpPr>
+          <p:spPr>
+            <a:xfrm>
+              <a:off x="1289304" y="4206240"/>
+              <a:ext cx="941832" cy="201168"/>
+            </a:xfrm>
+            <a:prstGeom prst="roundRect">
+              <a:avLst>
+                <a:gd name="adj" fmla="val 45454"/>
+              </a:avLst>
+            </a:prstGeom>
+            <a:noFill/>
+            <a:ln w="20320">
+              <a:solidFill>
+                <a:srgbClr val="8A8A8A"/>
+              </a:solidFill>
+            </a:ln>
+            <a:effectLst/>
+          </p:spPr>
+          <p:txBody>
+            <a:bodyPr rtlCol="0" anchor="ctr"/>
+            <a:lstStyle/>
+            <a:p>
+              <a:pPr algn="ctr"/>
+            </a:p>
+          </p:txBody>
+        </p:sp>
+        <p:sp>
+          <p:nvSpPr>
+            <p:cNvPr id="17" name="Rectangle 16"/>
+            <p:cNvSpPr/>
+            <p:nvPr/>
+          </p:nvSpPr>
+          <p:spPr>
+            <a:xfrm>
+              <a:off x="1476756" y="4366260"/>
+              <a:ext cx="82296" cy="82296"/>
+            </a:xfrm>
+            <a:prstGeom prst="rect">
+              <a:avLst/>
+            </a:prstGeom>
+            <a:solidFill>
+              <a:srgbClr val="8A8A8A"/>
+            </a:solidFill>
+            <a:ln w="7620">
+              <a:solidFill>
+                <a:srgbClr val="FFFFFF"/>
+              </a:solidFill>
+            </a:ln>
+            <a:effectLst/>
+          </p:spPr>
+          <p:txBody>
+            <a:bodyPr rtlCol="0" anchor="ctr"/>
+            <a:lstStyle/>
+            <a:p>
+              <a:pPr algn="ctr"/>
+            </a:p>
+          </p:txBody>
+        </p:sp>
+        <p:sp>
+          <p:nvSpPr>
+            <p:cNvPr id="18" name="Rectangle 17"/>
+            <p:cNvSpPr/>
+            <p:nvPr/>
+          </p:nvSpPr>
+          <p:spPr>
+            <a:xfrm>
+              <a:off x="1933956" y="4165092"/>
+              <a:ext cx="82296" cy="82296"/>
+            </a:xfrm>
+            <a:prstGeom prst="rect">
+              <a:avLst/>
+            </a:prstGeom>
+            <a:solidFill>
+              <a:srgbClr val="8A8A8A"/>
+            </a:solidFill>
+            <a:ln w="7620">
+              <a:solidFill>
+                <a:srgbClr val="FFFFFF"/>
+              </a:solidFill>
+            </a:ln>
+            <a:effectLst/>
+          </p:spPr>
+          <p:txBody>
+            <a:bodyPr rtlCol="0" anchor="ctr"/>
+            <a:lstStyle/>
+            <a:p>
+              <a:pPr algn="ctr"/>
+            </a:p>
+          </p:txBody>
+        </p:sp>
+        <p:sp>
+          <p:nvSpPr>
+            <p:cNvPr id="19" name="Rounded Rectangle 18"/>
+            <p:cNvSpPr/>
+            <p:nvPr/>
+          </p:nvSpPr>
+          <p:spPr>
+            <a:xfrm>
+              <a:off x="2414016" y="4206240"/>
+              <a:ext cx="941832" cy="201168"/>
+            </a:xfrm>
+            <a:prstGeom prst="roundRect">
+              <a:avLst>
+                <a:gd name="adj" fmla="val 45454"/>
+              </a:avLst>
+            </a:prstGeom>
+            <a:noFill/>
+            <a:ln w="20320">
+              <a:solidFill>
+                <a:srgbClr val="8A8A8A"/>
+              </a:solidFill>
+            </a:ln>
+            <a:effectLst/>
+          </p:spPr>
+          <p:txBody>
+            <a:bodyPr rtlCol="0" anchor="ctr"/>
+            <a:lstStyle/>
+            <a:p>
+              <a:pPr algn="ctr"/>
+            </a:p>
+          </p:txBody>
+        </p:sp>
+        <p:sp>
+          <p:nvSpPr>
+            <p:cNvPr id="20" name="Rectangle 19"/>
+            <p:cNvSpPr/>
+            <p:nvPr/>
+          </p:nvSpPr>
+          <p:spPr>
+            <a:xfrm>
+              <a:off x="2601468" y="4366260"/>
+              <a:ext cx="82296" cy="82296"/>
+            </a:xfrm>
+            <a:prstGeom prst="rect">
+              <a:avLst/>
+            </a:prstGeom>
+            <a:solidFill>
+              <a:srgbClr val="8A8A8A"/>
+            </a:solidFill>
+            <a:ln w="7620">
+              <a:solidFill>
+                <a:srgbClr val="FFFFFF"/>
+              </a:solidFill>
+            </a:ln>
+            <a:effectLst/>
+          </p:spPr>
+          <p:txBody>
+            <a:bodyPr rtlCol="0" anchor="ctr"/>
+            <a:lstStyle/>
+            <a:p>
+              <a:pPr algn="ctr"/>
+            </a:p>
+          </p:txBody>
+        </p:sp>
+        <p:sp>
+          <p:nvSpPr>
+            <p:cNvPr id="21" name="Rectangle 20"/>
+            <p:cNvSpPr/>
+            <p:nvPr/>
+          </p:nvSpPr>
+          <p:spPr>
+            <a:xfrm>
+              <a:off x="3058668" y="4165092"/>
+              <a:ext cx="82296" cy="82296"/>
+            </a:xfrm>
+            <a:prstGeom prst="rect">
+              <a:avLst/>
+            </a:prstGeom>
+            <a:solidFill>
+              <a:srgbClr val="8A8A8A"/>
+            </a:solidFill>
+            <a:ln w="7620">
+              <a:solidFill>
+                <a:srgbClr val="FFFFFF"/>
+              </a:solidFill>
+            </a:ln>
+            <a:effectLst/>
+          </p:spPr>
+          <p:txBody>
+            <a:bodyPr rtlCol="0" anchor="ctr"/>
+            <a:lstStyle/>
+            <a:p>
+              <a:pPr algn="ctr"/>
+            </a:p>
+          </p:txBody>
+        </p:sp>
+        <p:sp>
+          <p:nvSpPr>
+            <p:cNvPr id="22" name="Rectangle 21"/>
+            <p:cNvSpPr/>
+            <p:nvPr/>
+          </p:nvSpPr>
+          <p:spPr>
+            <a:xfrm>
+              <a:off x="1252728" y="4553712"/>
+              <a:ext cx="274320" cy="347472"/>
+            </a:xfrm>
+            <a:prstGeom prst="rect">
+              <a:avLst/>
+            </a:prstGeom>
+            <a:solidFill>
+              <a:srgbClr val="8E9DD6"/>
+            </a:solidFill>
+            <a:ln w="10160">
+              <a:solidFill>
+                <a:srgbClr val="FFFFFF"/>
+              </a:solidFill>
+            </a:ln>
+            <a:effectLst/>
+          </p:spPr>
+          <p:txBody>
+            <a:bodyPr rtlCol="0" anchor="ctr"/>
+            <a:lstStyle/>
+            <a:p>
+              <a:pPr algn="ctr"/>
+            </a:p>
+          </p:txBody>
+        </p:sp>
+        <p:sp>
+          <p:nvSpPr>
+            <p:cNvPr id="23" name="Rectangle 22"/>
+            <p:cNvSpPr/>
+            <p:nvPr/>
+          </p:nvSpPr>
+          <p:spPr>
+            <a:xfrm>
+              <a:off x="1581912" y="4553712"/>
+              <a:ext cx="201168" cy="347472"/>
+            </a:xfrm>
+            <a:prstGeom prst="rect">
+              <a:avLst/>
+            </a:prstGeom>
+            <a:pattFill prst="wdUpDiag">
+              <a:fgClr>
+                <a:srgbClr val="B4B4B4"/>
+              </a:fgClr>
+              <a:bgClr>
+                <a:srgbClr val="FFFFFF"/>
+              </a:bgClr>
+            </a:pattFill>
+            <a:ln w="10160">
+              <a:solidFill>
+                <a:srgbClr val="B4B4B4"/>
+              </a:solidFill>
+              <a:prstDash val="dash"/>
+            </a:ln>
+            <a:effectLst/>
+          </p:spPr>
+          <p:txBody>
+            <a:bodyPr rtlCol="0" anchor="ctr"/>
+            <a:lstStyle/>
+            <a:p>
+              <a:pPr algn="ctr"/>
+            </a:p>
+          </p:txBody>
+        </p:sp>
+        <p:sp>
+          <p:nvSpPr>
+            <p:cNvPr id="24" name="Rectangle 23"/>
+            <p:cNvSpPr/>
+            <p:nvPr/>
+          </p:nvSpPr>
+          <p:spPr>
+            <a:xfrm>
+              <a:off x="1837944" y="4626864"/>
+              <a:ext cx="365760" cy="274320"/>
+            </a:xfrm>
+            <a:prstGeom prst="rect">
+              <a:avLst/>
+            </a:prstGeom>
+            <a:solidFill>
+              <a:srgbClr val="8E9DD6"/>
+            </a:solidFill>
+            <a:ln w="10160">
+              <a:solidFill>
+                <a:srgbClr val="FFFFFF"/>
+              </a:solidFill>
+            </a:ln>
+            <a:effectLst/>
+          </p:spPr>
+          <p:txBody>
+            <a:bodyPr rtlCol="0" anchor="ctr"/>
+            <a:lstStyle/>
+            <a:p>
+              <a:pPr algn="ctr"/>
+            </a:p>
+          </p:txBody>
+        </p:sp>
+        <p:sp>
+          <p:nvSpPr>
+            <p:cNvPr id="25" name="Rectangle 24"/>
+            <p:cNvSpPr/>
+            <p:nvPr/>
+          </p:nvSpPr>
+          <p:spPr>
+            <a:xfrm>
+              <a:off x="1252728" y="3767328"/>
+              <a:ext cx="201168" cy="402336"/>
+            </a:xfrm>
+            <a:prstGeom prst="rect">
+              <a:avLst/>
+            </a:prstGeom>
+            <a:solidFill>
+              <a:srgbClr val="8E9DD6"/>
+            </a:solidFill>
+            <a:ln w="10160">
+              <a:solidFill>
+                <a:srgbClr val="FFFFFF"/>
+              </a:solidFill>
+            </a:ln>
+            <a:effectLst/>
+          </p:spPr>
+          <p:txBody>
+            <a:bodyPr rtlCol="0" anchor="ctr"/>
+            <a:lstStyle/>
+            <a:p>
+              <a:pPr algn="ctr"/>
+            </a:p>
+          </p:txBody>
+        </p:sp>
+        <p:sp>
+          <p:nvSpPr>
+            <p:cNvPr id="26" name="Rectangle 25"/>
+            <p:cNvSpPr/>
+            <p:nvPr/>
+          </p:nvSpPr>
+          <p:spPr>
+            <a:xfrm>
+              <a:off x="1508760" y="3767328"/>
+              <a:ext cx="329184" cy="402336"/>
+            </a:xfrm>
+            <a:prstGeom prst="rect">
+              <a:avLst/>
+            </a:prstGeom>
+            <a:pattFill prst="wdUpDiag">
+              <a:fgClr>
+                <a:srgbClr val="B4B4B4"/>
+              </a:fgClr>
+              <a:bgClr>
+                <a:srgbClr val="FFFFFF"/>
+              </a:bgClr>
+            </a:pattFill>
+            <a:ln w="10160">
+              <a:solidFill>
+                <a:srgbClr val="B4B4B4"/>
+              </a:solidFill>
+              <a:prstDash val="dash"/>
+            </a:ln>
+            <a:effectLst/>
+          </p:spPr>
+          <p:txBody>
+            <a:bodyPr rtlCol="0" anchor="ctr"/>
+            <a:lstStyle/>
+            <a:p>
+              <a:pPr algn="ctr"/>
+            </a:p>
+          </p:txBody>
+        </p:sp>
+        <p:sp>
+          <p:nvSpPr>
+            <p:cNvPr id="27" name="Rectangle 26"/>
+            <p:cNvSpPr/>
+            <p:nvPr/>
+          </p:nvSpPr>
+          <p:spPr>
+            <a:xfrm>
+              <a:off x="1892808" y="3840480"/>
+              <a:ext cx="292608" cy="329184"/>
+            </a:xfrm>
+            <a:prstGeom prst="rect">
+              <a:avLst/>
+            </a:prstGeom>
+            <a:solidFill>
+              <a:srgbClr val="8E9DD6"/>
+            </a:solidFill>
+            <a:ln w="10160">
+              <a:solidFill>
+                <a:srgbClr val="FFFFFF"/>
+              </a:solidFill>
+            </a:ln>
+            <a:effectLst/>
+          </p:spPr>
+          <p:txBody>
+            <a:bodyPr rtlCol="0" anchor="ctr"/>
+            <a:lstStyle/>
+            <a:p>
+              <a:pPr algn="ctr"/>
+            </a:p>
+          </p:txBody>
+        </p:sp>
+        <p:sp>
+          <p:nvSpPr>
+            <p:cNvPr id="28" name="Rectangle 27"/>
+            <p:cNvSpPr/>
+            <p:nvPr/>
+          </p:nvSpPr>
+          <p:spPr>
+            <a:xfrm>
+              <a:off x="2377440" y="4590288"/>
+              <a:ext cx="329184" cy="310896"/>
+            </a:xfrm>
+            <a:prstGeom prst="rect">
+              <a:avLst/>
+            </a:prstGeom>
+            <a:solidFill>
+              <a:srgbClr val="7CC5BE"/>
+            </a:solidFill>
+            <a:ln w="10160">
+              <a:solidFill>
+                <a:srgbClr val="FFFFFF"/>
+              </a:solidFill>
+            </a:ln>
+            <a:effectLst/>
+          </p:spPr>
+          <p:txBody>
+            <a:bodyPr rtlCol="0" anchor="ctr"/>
+            <a:lstStyle/>
+            <a:p>
+              <a:pPr algn="ctr"/>
+            </a:p>
+          </p:txBody>
+        </p:sp>
+        <p:sp>
+          <p:nvSpPr>
+            <p:cNvPr id="29" name="Rectangle 28"/>
+            <p:cNvSpPr/>
+            <p:nvPr/>
+          </p:nvSpPr>
+          <p:spPr>
+            <a:xfrm>
+              <a:off x="2761488" y="4553712"/>
+              <a:ext cx="274320" cy="347472"/>
+            </a:xfrm>
+            <a:prstGeom prst="rect">
+              <a:avLst/>
+            </a:prstGeom>
+            <a:pattFill prst="wdUpDiag">
+              <a:fgClr>
+                <a:srgbClr val="B4B4B4"/>
+              </a:fgClr>
+              <a:bgClr>
+                <a:srgbClr val="FFFFFF"/>
+              </a:bgClr>
+            </a:pattFill>
+            <a:ln w="10160">
+              <a:solidFill>
+                <a:srgbClr val="B4B4B4"/>
+              </a:solidFill>
+              <a:prstDash val="dash"/>
+            </a:ln>
+            <a:effectLst/>
+          </p:spPr>
+          <p:txBody>
+            <a:bodyPr rtlCol="0" anchor="ctr"/>
+            <a:lstStyle/>
+            <a:p>
+              <a:pPr algn="ctr"/>
+            </a:p>
+          </p:txBody>
+        </p:sp>
+        <p:sp>
+          <p:nvSpPr>
+            <p:cNvPr id="30" name="Rectangle 29"/>
+            <p:cNvSpPr/>
+            <p:nvPr/>
+          </p:nvSpPr>
+          <p:spPr>
+            <a:xfrm>
+              <a:off x="3081528" y="4553712"/>
+              <a:ext cx="292608" cy="347472"/>
+            </a:xfrm>
+            <a:prstGeom prst="rect">
+              <a:avLst/>
+            </a:prstGeom>
+            <a:solidFill>
+              <a:srgbClr val="7CC5BE"/>
+            </a:solidFill>
+            <a:ln w="10160">
+              <a:solidFill>
+                <a:srgbClr val="FFFFFF"/>
+              </a:solidFill>
+            </a:ln>
+            <a:effectLst/>
+          </p:spPr>
+          <p:txBody>
+            <a:bodyPr rtlCol="0" anchor="ctr"/>
+            <a:lstStyle/>
+            <a:p>
+              <a:pPr algn="ctr"/>
+            </a:p>
+          </p:txBody>
+        </p:sp>
+        <p:sp>
+          <p:nvSpPr>
+            <p:cNvPr id="31" name="Rectangle 30"/>
+            <p:cNvSpPr/>
+            <p:nvPr/>
+          </p:nvSpPr>
+          <p:spPr>
+            <a:xfrm>
+              <a:off x="2377440" y="3803904"/>
+              <a:ext cx="237744" cy="365760"/>
+            </a:xfrm>
+            <a:prstGeom prst="rect">
+              <a:avLst/>
+            </a:prstGeom>
+            <a:pattFill prst="wdUpDiag">
+              <a:fgClr>
+                <a:srgbClr val="B4B4B4"/>
+              </a:fgClr>
+              <a:bgClr>
+                <a:srgbClr val="FFFFFF"/>
+              </a:bgClr>
+            </a:pattFill>
+            <a:ln w="10160">
+              <a:solidFill>
+                <a:srgbClr val="B4B4B4"/>
+              </a:solidFill>
+              <a:prstDash val="dash"/>
+            </a:ln>
+            <a:effectLst/>
+          </p:spPr>
+          <p:txBody>
+            <a:bodyPr rtlCol="0" anchor="ctr"/>
+            <a:lstStyle/>
+            <a:p>
+              <a:pPr algn="ctr"/>
+            </a:p>
+          </p:txBody>
+        </p:sp>
+        <p:sp>
+          <p:nvSpPr>
+            <p:cNvPr id="32" name="Rectangle 31"/>
+            <p:cNvSpPr/>
+            <p:nvPr/>
+          </p:nvSpPr>
+          <p:spPr>
+            <a:xfrm>
+              <a:off x="2670048" y="3767328"/>
+              <a:ext cx="347472" cy="402336"/>
+            </a:xfrm>
+            <a:prstGeom prst="rect">
+              <a:avLst/>
+            </a:prstGeom>
+            <a:solidFill>
+              <a:srgbClr val="7CC5BE"/>
+            </a:solidFill>
+            <a:ln w="10160">
+              <a:solidFill>
+                <a:srgbClr val="FFFFFF"/>
+              </a:solidFill>
+            </a:ln>
+            <a:effectLst/>
+          </p:spPr>
+          <p:txBody>
+            <a:bodyPr rtlCol="0" anchor="ctr"/>
+            <a:lstStyle/>
+            <a:p>
+              <a:pPr algn="ctr"/>
+            </a:p>
+          </p:txBody>
+        </p:sp>
+        <p:sp>
+          <p:nvSpPr>
+            <p:cNvPr id="33" name="Rectangle 32"/>
+            <p:cNvSpPr/>
+            <p:nvPr/>
+          </p:nvSpPr>
+          <p:spPr>
+            <a:xfrm>
+              <a:off x="3081528" y="3895344"/>
+              <a:ext cx="292608" cy="274320"/>
+            </a:xfrm>
+            <a:prstGeom prst="rect">
+              <a:avLst/>
+            </a:prstGeom>
+            <a:solidFill>
+              <a:srgbClr val="7CC5BE"/>
+            </a:solidFill>
+            <a:ln w="10160">
+              <a:solidFill>
+                <a:srgbClr val="FFFFFF"/>
+              </a:solidFill>
+            </a:ln>
+            <a:effectLst/>
+          </p:spPr>
+          <p:txBody>
+            <a:bodyPr rtlCol="0" anchor="ctr"/>
+            <a:lstStyle/>
+            <a:p>
+              <a:pPr algn="ctr"/>
+            </a:p>
+          </p:txBody>
+        </p:sp>
+        <p:sp>
+          <p:nvSpPr>
+            <p:cNvPr id="34" name="TextBox 33"/>
+            <p:cNvSpPr txBox="1"/>
+            <p:nvPr/>
+          </p:nvSpPr>
+          <p:spPr>
+            <a:xfrm>
+              <a:off x="1197864" y="3355848"/>
+              <a:ext cx="1938528" cy="274320"/>
+            </a:xfrm>
+            <a:prstGeom prst="rect">
+              <a:avLst/>
+            </a:prstGeom>
+            <a:noFill/>
+          </p:spPr>
+          <p:txBody>
+            <a:bodyPr wrap="none" anchor="ctr" lIns="0" rIns="0" tIns="0" bIns="0">
+              <a:noAutofit/>
+            </a:bodyPr>
+            <a:lstStyle/>
+            <a:p>
+              <a:pPr algn="l"/>
+              <a:r>
+                <a:rPr sz="1600" b="1">
+                  <a:solidFill>
+                    <a:srgbClr val="555555"/>
+                  </a:solidFill>
+                  <a:latin typeface="Arial"/>
+                  <a:ea typeface="Arial"/>
+                </a:rPr>
+                <a:t>Fab 분리: OHT 2개</a:t>
+              </a:r>
+            </a:p>
+          </p:txBody>
+        </p:sp>
+        <p:sp>
+          <p:nvSpPr>
+            <p:cNvPr id="35" name="Rectangle 34"/>
+            <p:cNvSpPr/>
+            <p:nvPr/>
+          </p:nvSpPr>
+          <p:spPr>
+            <a:xfrm>
+              <a:off x="3721608" y="3657600"/>
+              <a:ext cx="2249424" cy="1298448"/>
+            </a:xfrm>
+            <a:prstGeom prst="rect">
+              <a:avLst/>
+            </a:prstGeom>
+            <a:solidFill>
+              <a:srgbClr val="FFFFFF"/>
+            </a:solidFill>
+            <a:ln w="17780">
+              <a:solidFill>
+                <a:srgbClr val="3C4FA5"/>
+              </a:solidFill>
+            </a:ln>
+            <a:effectLst/>
+          </p:spPr>
+          <p:txBody>
+            <a:bodyPr rtlCol="0" anchor="ctr"/>
+            <a:lstStyle/>
+            <a:p>
+              <a:pPr algn="ctr"/>
+            </a:p>
+          </p:txBody>
+        </p:sp>
+        <p:sp>
+          <p:nvSpPr>
+            <p:cNvPr id="36" name="Rectangle 35"/>
+            <p:cNvSpPr/>
+            <p:nvPr/>
+          </p:nvSpPr>
+          <p:spPr>
+            <a:xfrm>
+              <a:off x="3813048" y="4517136"/>
+              <a:ext cx="292608" cy="365760"/>
+            </a:xfrm>
+            <a:prstGeom prst="rect">
+              <a:avLst/>
+            </a:prstGeom>
+            <a:solidFill>
+              <a:srgbClr val="3C4FA5"/>
+            </a:solidFill>
+            <a:ln w="10160">
+              <a:solidFill>
+                <a:srgbClr val="FFFFFF"/>
+              </a:solidFill>
+            </a:ln>
+            <a:effectLst/>
+          </p:spPr>
+          <p:txBody>
+            <a:bodyPr rtlCol="0" anchor="ctr"/>
+            <a:lstStyle/>
+            <a:p>
+              <a:pPr algn="ctr"/>
+            </a:p>
+          </p:txBody>
+        </p:sp>
+        <p:sp>
+          <p:nvSpPr>
+            <p:cNvPr id="37" name="Rectangle 36"/>
+            <p:cNvSpPr/>
+            <p:nvPr/>
+          </p:nvSpPr>
+          <p:spPr>
+            <a:xfrm>
+              <a:off x="4160520" y="4517136"/>
+              <a:ext cx="292608" cy="365760"/>
+            </a:xfrm>
+            <a:prstGeom prst="rect">
+              <a:avLst/>
+            </a:prstGeom>
+            <a:solidFill>
+              <a:srgbClr val="3C4FA5"/>
+            </a:solidFill>
+            <a:ln w="10160">
+              <a:solidFill>
+                <a:srgbClr val="FFFFFF"/>
+              </a:solidFill>
+            </a:ln>
+            <a:effectLst/>
+          </p:spPr>
+          <p:txBody>
+            <a:bodyPr rtlCol="0" anchor="ctr"/>
+            <a:lstStyle/>
+            <a:p>
+              <a:pPr algn="ctr"/>
+            </a:p>
+          </p:txBody>
+        </p:sp>
+        <p:sp>
+          <p:nvSpPr>
+            <p:cNvPr id="38" name="Rectangle 37"/>
+            <p:cNvSpPr/>
+            <p:nvPr/>
+          </p:nvSpPr>
+          <p:spPr>
+            <a:xfrm>
+              <a:off x="4507992" y="4517136"/>
+              <a:ext cx="292608" cy="365760"/>
+            </a:xfrm>
+            <a:prstGeom prst="rect">
+              <a:avLst/>
+            </a:prstGeom>
+            <a:solidFill>
+              <a:srgbClr val="3C4FA5"/>
+            </a:solidFill>
+            <a:ln w="10160">
+              <a:solidFill>
+                <a:srgbClr val="FFFFFF"/>
+              </a:solidFill>
+            </a:ln>
+            <a:effectLst/>
+          </p:spPr>
+          <p:txBody>
+            <a:bodyPr rtlCol="0" anchor="ctr"/>
+            <a:lstStyle/>
+            <a:p>
+              <a:pPr algn="ctr"/>
+            </a:p>
+          </p:txBody>
+        </p:sp>
+        <p:sp>
+          <p:nvSpPr>
+            <p:cNvPr id="39" name="Rectangle 38"/>
+            <p:cNvSpPr/>
+            <p:nvPr/>
+          </p:nvSpPr>
+          <p:spPr>
+            <a:xfrm>
+              <a:off x="4855464" y="4517136"/>
+              <a:ext cx="292608" cy="365760"/>
+            </a:xfrm>
+            <a:prstGeom prst="rect">
+              <a:avLst/>
+            </a:prstGeom>
+            <a:solidFill>
+              <a:srgbClr val="3C4FA5"/>
+            </a:solidFill>
+            <a:ln w="10160">
+              <a:solidFill>
+                <a:srgbClr val="FFFFFF"/>
+              </a:solidFill>
+            </a:ln>
+            <a:effectLst/>
+          </p:spPr>
+          <p:txBody>
+            <a:bodyPr rtlCol="0" anchor="ctr"/>
+            <a:lstStyle/>
+            <a:p>
+              <a:pPr algn="ctr"/>
+            </a:p>
+          </p:txBody>
+        </p:sp>
+        <p:sp>
+          <p:nvSpPr>
+            <p:cNvPr id="40" name="Rectangle 39"/>
+            <p:cNvSpPr/>
+            <p:nvPr/>
+          </p:nvSpPr>
+          <p:spPr>
+            <a:xfrm>
+              <a:off x="5202936" y="4517136"/>
+              <a:ext cx="292608" cy="365760"/>
+            </a:xfrm>
+            <a:prstGeom prst="rect">
+              <a:avLst/>
+            </a:prstGeom>
+            <a:solidFill>
+              <a:srgbClr val="3C4FA5"/>
+            </a:solidFill>
+            <a:ln w="10160">
+              <a:solidFill>
+                <a:srgbClr val="FFFFFF"/>
+              </a:solidFill>
+            </a:ln>
+            <a:effectLst/>
+          </p:spPr>
+          <p:txBody>
+            <a:bodyPr rtlCol="0" anchor="ctr"/>
+            <a:lstStyle/>
+            <a:p>
+              <a:pPr algn="ctr"/>
+            </a:p>
+          </p:txBody>
+        </p:sp>
+        <p:sp>
+          <p:nvSpPr>
+            <p:cNvPr id="41" name="Rectangle 40"/>
+            <p:cNvSpPr/>
+            <p:nvPr/>
+          </p:nvSpPr>
+          <p:spPr>
+            <a:xfrm>
+              <a:off x="3813048" y="3767328"/>
+              <a:ext cx="292608" cy="365760"/>
+            </a:xfrm>
+            <a:prstGeom prst="rect">
+              <a:avLst/>
+            </a:prstGeom>
+            <a:solidFill>
+              <a:srgbClr val="6E56B0"/>
+            </a:solidFill>
+            <a:ln w="10160">
+              <a:solidFill>
+                <a:srgbClr val="FFFFFF"/>
+              </a:solidFill>
+            </a:ln>
+            <a:effectLst/>
+          </p:spPr>
+          <p:txBody>
+            <a:bodyPr rtlCol="0" anchor="ctr"/>
+            <a:lstStyle/>
+            <a:p>
+              <a:pPr algn="ctr"/>
+            </a:p>
+          </p:txBody>
+        </p:sp>
+        <p:sp>
+          <p:nvSpPr>
+            <p:cNvPr id="42" name="Rectangle 41"/>
+            <p:cNvSpPr/>
+            <p:nvPr/>
+          </p:nvSpPr>
+          <p:spPr>
+            <a:xfrm>
+              <a:off x="4160520" y="3767328"/>
+              <a:ext cx="292608" cy="365760"/>
+            </a:xfrm>
+            <a:prstGeom prst="rect">
+              <a:avLst/>
+            </a:prstGeom>
+            <a:solidFill>
+              <a:srgbClr val="6E56B0"/>
+            </a:solidFill>
+            <a:ln w="10160">
+              <a:solidFill>
+                <a:srgbClr val="FFFFFF"/>
+              </a:solidFill>
+            </a:ln>
+            <a:effectLst/>
+          </p:spPr>
+          <p:txBody>
+            <a:bodyPr rtlCol="0" anchor="ctr"/>
+            <a:lstStyle/>
+            <a:p>
+              <a:pPr algn="ctr"/>
+            </a:p>
+          </p:txBody>
+        </p:sp>
+        <p:sp>
+          <p:nvSpPr>
+            <p:cNvPr id="43" name="Rectangle 42"/>
+            <p:cNvSpPr/>
+            <p:nvPr/>
+          </p:nvSpPr>
+          <p:spPr>
+            <a:xfrm>
+              <a:off x="4507992" y="3767328"/>
+              <a:ext cx="292608" cy="365760"/>
+            </a:xfrm>
+            <a:prstGeom prst="rect">
+              <a:avLst/>
+            </a:prstGeom>
+            <a:solidFill>
+              <a:srgbClr val="6E56B0"/>
+            </a:solidFill>
+            <a:ln w="10160">
+              <a:solidFill>
+                <a:srgbClr val="FFFFFF"/>
+              </a:solidFill>
+            </a:ln>
+            <a:effectLst/>
+          </p:spPr>
+          <p:txBody>
+            <a:bodyPr rtlCol="0" anchor="ctr"/>
+            <a:lstStyle/>
+            <a:p>
+              <a:pPr algn="ctr"/>
+            </a:p>
+          </p:txBody>
+        </p:sp>
+        <p:sp>
+          <p:nvSpPr>
+            <p:cNvPr id="44" name="Rectangle 43"/>
+            <p:cNvSpPr/>
+            <p:nvPr/>
+          </p:nvSpPr>
+          <p:spPr>
+            <a:xfrm>
+              <a:off x="4855464" y="3767328"/>
+              <a:ext cx="292608" cy="365760"/>
+            </a:xfrm>
+            <a:prstGeom prst="rect">
+              <a:avLst/>
+            </a:prstGeom>
+            <a:solidFill>
+              <a:srgbClr val="6E56B0"/>
+            </a:solidFill>
+            <a:ln w="10160">
+              <a:solidFill>
+                <a:srgbClr val="FFFFFF"/>
+              </a:solidFill>
+            </a:ln>
+            <a:effectLst/>
+          </p:spPr>
+          <p:txBody>
+            <a:bodyPr rtlCol="0" anchor="ctr"/>
+            <a:lstStyle/>
+            <a:p>
+              <a:pPr algn="ctr"/>
+            </a:p>
+          </p:txBody>
+        </p:sp>
+        <p:sp>
+          <p:nvSpPr>
+            <p:cNvPr id="45" name="Rectangle 44"/>
+            <p:cNvSpPr/>
+            <p:nvPr/>
+          </p:nvSpPr>
+          <p:spPr>
+            <a:xfrm>
+              <a:off x="5202936" y="3767328"/>
+              <a:ext cx="292608" cy="365760"/>
+            </a:xfrm>
+            <a:prstGeom prst="rect">
+              <a:avLst/>
+            </a:prstGeom>
+            <a:solidFill>
+              <a:srgbClr val="6E56B0"/>
+            </a:solidFill>
+            <a:ln w="10160">
+              <a:solidFill>
+                <a:srgbClr val="FFFFFF"/>
+              </a:solidFill>
+            </a:ln>
+            <a:effectLst/>
+          </p:spPr>
+          <p:txBody>
+            <a:bodyPr rtlCol="0" anchor="ctr"/>
+            <a:lstStyle/>
+            <a:p>
+              <a:pPr algn="ctr"/>
+            </a:p>
+          </p:txBody>
+        </p:sp>
+        <p:sp>
+          <p:nvSpPr>
+            <p:cNvPr id="46" name="Rounded Rectangle 45"/>
+            <p:cNvSpPr/>
+            <p:nvPr/>
+          </p:nvSpPr>
+          <p:spPr>
+            <a:xfrm>
+              <a:off x="3813048" y="4206240"/>
+              <a:ext cx="1700784" cy="201168"/>
+            </a:xfrm>
+            <a:prstGeom prst="roundRect">
+              <a:avLst>
+                <a:gd name="adj" fmla="val 45454"/>
+              </a:avLst>
+            </a:prstGeom>
+            <a:noFill/>
+            <a:ln w="27940">
+              <a:solidFill>
+                <a:srgbClr val="26336E"/>
+              </a:solidFill>
+            </a:ln>
+            <a:effectLst/>
+          </p:spPr>
+          <p:txBody>
+            <a:bodyPr rtlCol="0" anchor="ctr"/>
+            <a:lstStyle/>
+            <a:p>
+              <a:pPr algn="ctr"/>
+            </a:p>
+          </p:txBody>
+        </p:sp>
+        <p:sp>
+          <p:nvSpPr>
+            <p:cNvPr id="47" name="Rectangle 46"/>
+            <p:cNvSpPr/>
+            <p:nvPr/>
+          </p:nvSpPr>
+          <p:spPr>
+            <a:xfrm>
+              <a:off x="4046220" y="4366260"/>
+              <a:ext cx="82296" cy="82296"/>
+            </a:xfrm>
+            <a:prstGeom prst="rect">
+              <a:avLst/>
+            </a:prstGeom>
+            <a:solidFill>
+              <a:srgbClr val="26336E"/>
+            </a:solidFill>
+            <a:ln w="7620">
+              <a:solidFill>
+                <a:srgbClr val="FFFFFF"/>
+              </a:solidFill>
+            </a:ln>
+            <a:effectLst/>
+          </p:spPr>
+          <p:txBody>
+            <a:bodyPr rtlCol="0" anchor="ctr"/>
+            <a:lstStyle/>
+            <a:p>
+              <a:pPr algn="ctr"/>
+            </a:p>
+          </p:txBody>
+        </p:sp>
+        <p:sp>
+          <p:nvSpPr>
+            <p:cNvPr id="48" name="Rectangle 47"/>
+            <p:cNvSpPr/>
+            <p:nvPr/>
+          </p:nvSpPr>
+          <p:spPr>
+            <a:xfrm>
+              <a:off x="4594860" y="4165092"/>
+              <a:ext cx="82296" cy="82296"/>
+            </a:xfrm>
+            <a:prstGeom prst="rect">
+              <a:avLst/>
+            </a:prstGeom>
+            <a:solidFill>
+              <a:srgbClr val="26336E"/>
+            </a:solidFill>
+            <a:ln w="7620">
+              <a:solidFill>
+                <a:srgbClr val="FFFFFF"/>
+              </a:solidFill>
+            </a:ln>
+            <a:effectLst/>
+          </p:spPr>
+          <p:txBody>
+            <a:bodyPr rtlCol="0" anchor="ctr"/>
+            <a:lstStyle/>
+            <a:p>
+              <a:pPr algn="ctr"/>
+            </a:p>
+          </p:txBody>
+        </p:sp>
+        <p:sp>
+          <p:nvSpPr>
+            <p:cNvPr id="49" name="Rectangle 48"/>
+            <p:cNvSpPr/>
+            <p:nvPr/>
+          </p:nvSpPr>
+          <p:spPr>
+            <a:xfrm>
+              <a:off x="5097780" y="4366260"/>
+              <a:ext cx="82296" cy="82296"/>
+            </a:xfrm>
+            <a:prstGeom prst="rect">
+              <a:avLst/>
+            </a:prstGeom>
+            <a:solidFill>
+              <a:srgbClr val="26336E"/>
+            </a:solidFill>
+            <a:ln w="7620">
+              <a:solidFill>
+                <a:srgbClr val="FFFFFF"/>
+              </a:solidFill>
+            </a:ln>
+            <a:effectLst/>
+          </p:spPr>
+          <p:txBody>
+            <a:bodyPr rtlCol="0" anchor="ctr"/>
+            <a:lstStyle/>
+            <a:p>
+              <a:pPr algn="ctr"/>
+            </a:p>
+          </p:txBody>
+        </p:sp>
+        <p:sp>
+          <p:nvSpPr>
+            <p:cNvPr id="50" name="Rectangle 49"/>
+            <p:cNvSpPr/>
+            <p:nvPr/>
+          </p:nvSpPr>
+          <p:spPr>
+            <a:xfrm>
+              <a:off x="5586984" y="3730752"/>
+              <a:ext cx="329184" cy="1152144"/>
+            </a:xfrm>
+            <a:prstGeom prst="rect">
+              <a:avLst/>
+            </a:prstGeom>
+            <a:solidFill>
+              <a:srgbClr val="FCEFD9"/>
+            </a:solidFill>
+            <a:ln w="12700">
+              <a:solidFill>
+                <a:srgbClr val="E39B2D"/>
+              </a:solidFill>
+              <a:prstDash val="dash"/>
+            </a:ln>
+            <a:effectLst/>
+          </p:spPr>
+          <p:txBody>
+            <a:bodyPr rtlCol="0" anchor="ctr"/>
+            <a:lstStyle/>
+            <a:p>
+              <a:pPr algn="ctr"/>
+            </a:p>
+          </p:txBody>
+        </p:sp>
+        <p:sp>
+          <p:nvSpPr>
+            <p:cNvPr id="51" name="TextBox 50"/>
+            <p:cNvSpPr txBox="1"/>
+            <p:nvPr/>
+          </p:nvSpPr>
+          <p:spPr>
+            <a:xfrm rot="16200000">
+              <a:off x="5431536" y="4169664"/>
+              <a:ext cx="640080" cy="274320"/>
+            </a:xfrm>
+            <a:prstGeom prst="rect">
+              <a:avLst/>
+            </a:prstGeom>
+            <a:noFill/>
+          </p:spPr>
+          <p:txBody>
+            <a:bodyPr wrap="none" anchor="ctr" lIns="0" rIns="0" tIns="0" bIns="0">
+              <a:noAutofit/>
+            </a:bodyPr>
+            <a:lstStyle/>
+            <a:p>
+              <a:pPr algn="ctr"/>
+              <a:r>
+                <a:rPr sz="1600" b="1">
+                  <a:solidFill>
+                    <a:srgbClr val="B86E00"/>
+                  </a:solidFill>
+                  <a:latin typeface="Arial"/>
+                  <a:ea typeface="Arial"/>
+                </a:rPr>
+                <a:t>확보</a:t>
+              </a:r>
+            </a:p>
+          </p:txBody>
+        </p:sp>
+        <p:sp>
+          <p:nvSpPr>
+            <p:cNvPr id="52" name="TextBox 51"/>
+            <p:cNvSpPr txBox="1"/>
+            <p:nvPr/>
+          </p:nvSpPr>
+          <p:spPr>
+            <a:xfrm>
+              <a:off x="3721608" y="3355848"/>
+              <a:ext cx="1938528" cy="274320"/>
+            </a:xfrm>
+            <a:prstGeom prst="rect">
+              <a:avLst/>
+            </a:prstGeom>
+            <a:noFill/>
+          </p:spPr>
+          <p:txBody>
+            <a:bodyPr wrap="none" anchor="ctr" lIns="0" rIns="0" tIns="0" bIns="0">
+              <a:noAutofit/>
+            </a:bodyPr>
+            <a:lstStyle/>
+            <a:p>
+              <a:pPr algn="l"/>
+              <a:r>
+                <a:rPr sz="1600" b="1">
+                  <a:solidFill>
+                    <a:srgbClr val="3C4FA5"/>
+                  </a:solidFill>
+                  <a:latin typeface="Arial"/>
+                  <a:ea typeface="Arial"/>
+                </a:rPr>
+                <a:t>Common: OHT 1개</a:t>
+              </a:r>
+            </a:p>
+          </p:txBody>
+        </p:sp>
+      </p:grpSp>
+      <p:sp>
+        <p:nvSpPr>
+          <p:cNvPr id="53" name="Rectangle 52"/>
           <p:cNvSpPr/>
           <p:nvPr/>
         </p:nvSpPr>
@@ -29895,7 +31160,7 @@
       </p:sp>
       <p:sp>
         <p:nvSpPr>
-          <p:cNvPr id="15" name="TextBox 14"/>
+          <p:cNvPr id="54" name="TextBox 53"/>
           <p:cNvSpPr txBox="1"/>
           <p:nvPr/>
         </p:nvSpPr>
@@ -29945,7 +31210,7 @@
       </p:sp>
       <p:sp>
         <p:nvSpPr>
-          <p:cNvPr id="16" name="Rectangle 15"/>
+          <p:cNvPr id="55" name="Rectangle 54"/>
           <p:cNvSpPr/>
           <p:nvPr/>
         </p:nvSpPr>
@@ -29977,7 +31242,7 @@
       </p:sp>
       <p:sp>
         <p:nvSpPr>
-          <p:cNvPr id="17" name="TextBox 16"/>
+          <p:cNvPr id="56" name="TextBox 55"/>
           <p:cNvSpPr txBox="1"/>
           <p:nvPr/>
         </p:nvSpPr>
@@ -30027,7 +31292,7 @@
       </p:sp>
       <p:sp>
         <p:nvSpPr>
-          <p:cNvPr id="18" name="Rectangle 17"/>
+          <p:cNvPr id="57" name="Rectangle 56"/>
           <p:cNvSpPr/>
           <p:nvPr/>
         </p:nvSpPr>
@@ -30059,7 +31324,7 @@
       </p:sp>
       <p:sp>
         <p:nvSpPr>
-          <p:cNvPr id="19" name="TextBox 18"/>
+          <p:cNvPr id="58" name="TextBox 57"/>
           <p:cNvSpPr txBox="1"/>
           <p:nvPr/>
         </p:nvSpPr>
@@ -30109,7 +31374,7 @@
       </p:sp>
       <p:sp>
         <p:nvSpPr>
-          <p:cNvPr id="20" name="Rectangle 19"/>
+          <p:cNvPr id="59" name="Rectangle 58"/>
           <p:cNvSpPr/>
           <p:nvPr/>
         </p:nvSpPr>
@@ -30139,7 +31404,7 @@
       </p:sp>
       <p:sp>
         <p:nvSpPr>
-          <p:cNvPr id="21" name="Rectangle 20"/>
+          <p:cNvPr id="60" name="Rectangle 59"/>
           <p:cNvSpPr/>
           <p:nvPr/>
         </p:nvSpPr>
@@ -30169,7 +31434,7 @@
       </p:sp>
       <p:sp>
         <p:nvSpPr>
-          <p:cNvPr id="22" name="Oval 21"/>
+          <p:cNvPr id="61" name="Oval 60"/>
           <p:cNvSpPr/>
           <p:nvPr/>
         </p:nvSpPr>
@@ -30199,7 +31464,7 @@
       </p:sp>
       <p:sp>
         <p:nvSpPr>
-          <p:cNvPr id="23" name="TextBox 22"/>
+          <p:cNvPr id="62" name="TextBox 61"/>
           <p:cNvSpPr txBox="1"/>
           <p:nvPr/>
         </p:nvSpPr>
@@ -30239,7 +31504,7 @@
       </p:sp>
       <p:sp>
         <p:nvSpPr>
-          <p:cNvPr id="24" name="TextBox 23"/>
+          <p:cNvPr id="63" name="TextBox 62"/>
           <p:cNvSpPr txBox="1"/>
           <p:nvPr/>
         </p:nvSpPr>
@@ -30287,33 +31552,1305 @@
           </a:p>
         </p:txBody>
       </p:sp>
-      <p:pic>
-        <p:nvPicPr>
-          <p:cNvPr id="25" name="Picture 24" descr="c3_agility.png"/>
-          <p:cNvPicPr>
-            <a:picLocks noChangeAspect="1"/>
-          </p:cNvPicPr>
-          <p:nvPr/>
-        </p:nvPicPr>
-        <p:blipFill>
-          <a:blip r:embed="rId3"/>
-          <a:stretch>
-            <a:fillRect/>
-          </a:stretch>
-        </p:blipFill>
-        <p:spPr>
-          <a:xfrm>
-            <a:off x="6720840" y="3364992"/>
-            <a:ext cx="4846320" cy="1645919"/>
-          </a:xfrm>
-          <a:prstGeom prst="rect">
-            <a:avLst/>
-          </a:prstGeom>
-        </p:spPr>
-      </p:pic>
-      <p:sp>
-        <p:nvSpPr>
-          <p:cNvPr id="26" name="Rectangle 25"/>
+      <p:grpSp>
+        <p:nvGrpSpPr>
+          <p:cNvPr id="64" name="그림 2 시황 변화 대응력 (도형)"/>
+          <p:cNvGrpSpPr/>
+          <p:nvPr/>
+        </p:nvGrpSpPr>
+        <p:grpSpPr>
+          <a:xfrm>
+            <a:off x="6812279" y="3355848"/>
+            <a:ext cx="4686301" cy="1572768"/>
+            <a:chOff x="6812279" y="3355848"/>
+            <a:chExt cx="4686301" cy="1572768"/>
+          </a:xfrm>
+        </p:grpSpPr>
+        <p:sp>
+          <p:nvSpPr>
+            <p:cNvPr id="65" name="Rounded Rectangle 64"/>
+            <p:cNvSpPr/>
+            <p:nvPr/>
+          </p:nvSpPr>
+          <p:spPr>
+            <a:xfrm>
+              <a:off x="7982712" y="3621024"/>
+              <a:ext cx="2011680" cy="1298448"/>
+            </a:xfrm>
+            <a:prstGeom prst="roundRect">
+              <a:avLst>
+                <a:gd name="adj" fmla="val 5633"/>
+              </a:avLst>
+            </a:prstGeom>
+            <a:solidFill>
+              <a:srgbClr val="E8F5F4"/>
+            </a:solidFill>
+            <a:ln w="15240">
+              <a:solidFill>
+                <a:srgbClr val="1E8C8C"/>
+              </a:solidFill>
+              <a:prstDash val="dash"/>
+            </a:ln>
+            <a:effectLst/>
+          </p:spPr>
+          <p:txBody>
+            <a:bodyPr rtlCol="0" anchor="ctr"/>
+            <a:lstStyle/>
+            <a:p>
+              <a:pPr algn="ctr"/>
+            </a:p>
+          </p:txBody>
+        </p:sp>
+        <p:cxnSp>
+          <p:nvCxnSpPr>
+            <p:cNvPr id="66" name="Connector 65"/>
+            <p:cNvCxnSpPr/>
+            <p:nvPr/>
+          </p:nvCxnSpPr>
+          <p:spPr>
+            <a:xfrm>
+              <a:off x="7196327" y="3895344"/>
+              <a:ext cx="768096" cy="109728"/>
+            </a:xfrm>
+            <a:prstGeom prst="line">
+              <a:avLst/>
+            </a:prstGeom>
+            <a:ln w="20320">
+              <a:solidFill>
+                <a:srgbClr val="3C4FA5"/>
+              </a:solidFill>
+              <a:tailEnd type="triangle" w="med" len="med"/>
+            </a:ln>
+          </p:spPr>
+        </p:cxnSp>
+        <p:cxnSp>
+          <p:nvCxnSpPr>
+            <p:cNvPr id="67" name="Connector 66"/>
+            <p:cNvCxnSpPr/>
+            <p:nvPr/>
+          </p:nvCxnSpPr>
+          <p:spPr>
+            <a:xfrm>
+              <a:off x="7196327" y="3895344"/>
+              <a:ext cx="768096" cy="676656"/>
+            </a:xfrm>
+            <a:prstGeom prst="line">
+              <a:avLst/>
+            </a:prstGeom>
+            <a:ln w="20320">
+              <a:solidFill>
+                <a:srgbClr val="3C4FA5"/>
+              </a:solidFill>
+              <a:tailEnd type="triangle" w="med" len="med"/>
+            </a:ln>
+          </p:spPr>
+        </p:cxnSp>
+        <p:cxnSp>
+          <p:nvCxnSpPr>
+            <p:cNvPr id="68" name="Connector 67"/>
+            <p:cNvCxnSpPr/>
+            <p:nvPr/>
+          </p:nvCxnSpPr>
+          <p:spPr>
+            <a:xfrm flipV="1">
+              <a:off x="7196327" y="4133088"/>
+              <a:ext cx="768096" cy="457200"/>
+            </a:xfrm>
+            <a:prstGeom prst="line">
+              <a:avLst/>
+            </a:prstGeom>
+            <a:ln w="20320">
+              <a:solidFill>
+                <a:srgbClr val="1E8C8C"/>
+              </a:solidFill>
+              <a:tailEnd type="triangle" w="med" len="med"/>
+            </a:ln>
+          </p:spPr>
+        </p:cxnSp>
+        <p:cxnSp>
+          <p:nvCxnSpPr>
+            <p:cNvPr id="69" name="Connector 68"/>
+            <p:cNvCxnSpPr/>
+            <p:nvPr/>
+          </p:nvCxnSpPr>
+          <p:spPr>
+            <a:xfrm>
+              <a:off x="7196327" y="4590288"/>
+              <a:ext cx="768096" cy="109728"/>
+            </a:xfrm>
+            <a:prstGeom prst="line">
+              <a:avLst/>
+            </a:prstGeom>
+            <a:ln w="20320">
+              <a:solidFill>
+                <a:srgbClr val="1E8C8C"/>
+              </a:solidFill>
+              <a:tailEnd type="triangle" w="med" len="med"/>
+            </a:ln>
+          </p:spPr>
+        </p:cxnSp>
+        <p:sp>
+          <p:nvSpPr>
+            <p:cNvPr id="70" name="Rectangle 69"/>
+            <p:cNvSpPr/>
+            <p:nvPr/>
+          </p:nvSpPr>
+          <p:spPr>
+            <a:xfrm>
+              <a:off x="7424927" y="3895344"/>
+              <a:ext cx="91440" cy="91440"/>
+            </a:xfrm>
+            <a:prstGeom prst="rect">
+              <a:avLst/>
+            </a:prstGeom>
+            <a:solidFill>
+              <a:srgbClr val="3C4FA5"/>
+            </a:solidFill>
+            <a:ln w="7620">
+              <a:solidFill>
+                <a:srgbClr val="FFFFFF"/>
+              </a:solidFill>
+            </a:ln>
+            <a:effectLst/>
+          </p:spPr>
+          <p:txBody>
+            <a:bodyPr rtlCol="0" anchor="ctr"/>
+            <a:lstStyle/>
+            <a:p>
+              <a:pPr algn="ctr"/>
+            </a:p>
+          </p:txBody>
+        </p:sp>
+        <p:sp>
+          <p:nvSpPr>
+            <p:cNvPr id="71" name="Rectangle 70"/>
+            <p:cNvSpPr/>
+            <p:nvPr/>
+          </p:nvSpPr>
+          <p:spPr>
+            <a:xfrm>
+              <a:off x="7644383" y="3986784"/>
+              <a:ext cx="91440" cy="91440"/>
+            </a:xfrm>
+            <a:prstGeom prst="rect">
+              <a:avLst/>
+            </a:prstGeom>
+            <a:solidFill>
+              <a:srgbClr val="3C4FA5"/>
+            </a:solidFill>
+            <a:ln w="7620">
+              <a:solidFill>
+                <a:srgbClr val="FFFFFF"/>
+              </a:solidFill>
+            </a:ln>
+            <a:effectLst/>
+          </p:spPr>
+          <p:txBody>
+            <a:bodyPr rtlCol="0" anchor="ctr"/>
+            <a:lstStyle/>
+            <a:p>
+              <a:pPr algn="ctr"/>
+            </a:p>
+          </p:txBody>
+        </p:sp>
+        <p:sp>
+          <p:nvSpPr>
+            <p:cNvPr id="72" name="Rectangle 71"/>
+            <p:cNvSpPr/>
+            <p:nvPr/>
+          </p:nvSpPr>
+          <p:spPr>
+            <a:xfrm>
+              <a:off x="7443215" y="4507992"/>
+              <a:ext cx="91440" cy="91440"/>
+            </a:xfrm>
+            <a:prstGeom prst="rect">
+              <a:avLst/>
+            </a:prstGeom>
+            <a:solidFill>
+              <a:srgbClr val="1E8C8C"/>
+            </a:solidFill>
+            <a:ln w="7620">
+              <a:solidFill>
+                <a:srgbClr val="FFFFFF"/>
+              </a:solidFill>
+            </a:ln>
+            <a:effectLst/>
+          </p:spPr>
+          <p:txBody>
+            <a:bodyPr rtlCol="0" anchor="ctr"/>
+            <a:lstStyle/>
+            <a:p>
+              <a:pPr algn="ctr"/>
+            </a:p>
+          </p:txBody>
+        </p:sp>
+        <p:sp>
+          <p:nvSpPr>
+            <p:cNvPr id="73" name="Rectangle 72"/>
+            <p:cNvSpPr/>
+            <p:nvPr/>
+          </p:nvSpPr>
+          <p:spPr>
+            <a:xfrm>
+              <a:off x="7680960" y="4535424"/>
+              <a:ext cx="91440" cy="91440"/>
+            </a:xfrm>
+            <a:prstGeom prst="rect">
+              <a:avLst/>
+            </a:prstGeom>
+            <a:solidFill>
+              <a:srgbClr val="1E8C8C"/>
+            </a:solidFill>
+            <a:ln w="7620">
+              <a:solidFill>
+                <a:srgbClr val="FFFFFF"/>
+              </a:solidFill>
+            </a:ln>
+            <a:effectLst/>
+          </p:spPr>
+          <p:txBody>
+            <a:bodyPr rtlCol="0" anchor="ctr"/>
+            <a:lstStyle/>
+            <a:p>
+              <a:pPr algn="ctr"/>
+            </a:p>
+          </p:txBody>
+        </p:sp>
+        <p:sp>
+          <p:nvSpPr>
+            <p:cNvPr id="74" name="Oval 73"/>
+            <p:cNvSpPr/>
+            <p:nvPr/>
+          </p:nvSpPr>
+          <p:spPr>
+            <a:xfrm>
+              <a:off x="6812279" y="3712464"/>
+              <a:ext cx="365760" cy="365760"/>
+            </a:xfrm>
+            <a:prstGeom prst="ellipse">
+              <a:avLst/>
+            </a:prstGeom>
+            <a:solidFill>
+              <a:srgbClr val="3C4FA5"/>
+            </a:solidFill>
+            <a:ln w="12700">
+              <a:solidFill>
+                <a:srgbClr val="FFFFFF"/>
+              </a:solidFill>
+            </a:ln>
+            <a:effectLst/>
+          </p:spPr>
+          <p:txBody>
+            <a:bodyPr rtlCol="0" anchor="ctr"/>
+            <a:lstStyle/>
+            <a:p>
+              <a:pPr algn="ctr"/>
+            </a:p>
+          </p:txBody>
+        </p:sp>
+        <p:cxnSp>
+          <p:nvCxnSpPr>
+            <p:cNvPr id="75" name="Connector 74"/>
+            <p:cNvCxnSpPr/>
+            <p:nvPr/>
+          </p:nvCxnSpPr>
+          <p:spPr>
+            <a:xfrm>
+              <a:off x="6858000" y="3964838"/>
+              <a:ext cx="274320" cy="0"/>
+            </a:xfrm>
+            <a:prstGeom prst="line">
+              <a:avLst/>
+            </a:prstGeom>
+            <a:ln w="8890">
+              <a:solidFill>
+                <a:srgbClr val="808DC4"/>
+              </a:solidFill>
+            </a:ln>
+          </p:spPr>
+        </p:cxnSp>
+        <p:cxnSp>
+          <p:nvCxnSpPr>
+            <p:cNvPr id="76" name="Connector 75"/>
+            <p:cNvCxnSpPr/>
+            <p:nvPr/>
+          </p:nvCxnSpPr>
+          <p:spPr>
+            <a:xfrm flipV="1">
+              <a:off x="6925665" y="3758184"/>
+              <a:ext cx="0" cy="274320"/>
+            </a:xfrm>
+            <a:prstGeom prst="line">
+              <a:avLst/>
+            </a:prstGeom>
+            <a:ln w="8890">
+              <a:solidFill>
+                <a:srgbClr val="808DC4"/>
+              </a:solidFill>
+            </a:ln>
+          </p:spPr>
+        </p:cxnSp>
+        <p:cxnSp>
+          <p:nvCxnSpPr>
+            <p:cNvPr id="77" name="Connector 76"/>
+            <p:cNvCxnSpPr/>
+            <p:nvPr/>
+          </p:nvCxnSpPr>
+          <p:spPr>
+            <a:xfrm>
+              <a:off x="6858000" y="3895344"/>
+              <a:ext cx="274320" cy="0"/>
+            </a:xfrm>
+            <a:prstGeom prst="line">
+              <a:avLst/>
+            </a:prstGeom>
+            <a:ln w="8890">
+              <a:solidFill>
+                <a:srgbClr val="808DC4"/>
+              </a:solidFill>
+            </a:ln>
+          </p:spPr>
+        </p:cxnSp>
+        <p:cxnSp>
+          <p:nvCxnSpPr>
+            <p:cNvPr id="78" name="Connector 77"/>
+            <p:cNvCxnSpPr/>
+            <p:nvPr/>
+          </p:nvCxnSpPr>
+          <p:spPr>
+            <a:xfrm flipV="1">
+              <a:off x="6995159" y="3758184"/>
+              <a:ext cx="0" cy="274320"/>
+            </a:xfrm>
+            <a:prstGeom prst="line">
+              <a:avLst/>
+            </a:prstGeom>
+            <a:ln w="8890">
+              <a:solidFill>
+                <a:srgbClr val="808DC4"/>
+              </a:solidFill>
+            </a:ln>
+          </p:spPr>
+        </p:cxnSp>
+        <p:cxnSp>
+          <p:nvCxnSpPr>
+            <p:cNvPr id="79" name="Connector 78"/>
+            <p:cNvCxnSpPr/>
+            <p:nvPr/>
+          </p:nvCxnSpPr>
+          <p:spPr>
+            <a:xfrm>
+              <a:off x="6858000" y="3825849"/>
+              <a:ext cx="274320" cy="0"/>
+            </a:xfrm>
+            <a:prstGeom prst="line">
+              <a:avLst/>
+            </a:prstGeom>
+            <a:ln w="8890">
+              <a:solidFill>
+                <a:srgbClr val="808DC4"/>
+              </a:solidFill>
+            </a:ln>
+          </p:spPr>
+        </p:cxnSp>
+        <p:cxnSp>
+          <p:nvCxnSpPr>
+            <p:cNvPr id="80" name="Connector 79"/>
+            <p:cNvCxnSpPr/>
+            <p:nvPr/>
+          </p:nvCxnSpPr>
+          <p:spPr>
+            <a:xfrm flipV="1">
+              <a:off x="7064654" y="3758184"/>
+              <a:ext cx="0" cy="274320"/>
+            </a:xfrm>
+            <a:prstGeom prst="line">
+              <a:avLst/>
+            </a:prstGeom>
+            <a:ln w="8890">
+              <a:solidFill>
+                <a:srgbClr val="808DC4"/>
+              </a:solidFill>
+            </a:ln>
+          </p:spPr>
+        </p:cxnSp>
+        <p:sp>
+          <p:nvSpPr>
+            <p:cNvPr id="81" name="Rectangle 80"/>
+            <p:cNvSpPr/>
+            <p:nvPr/>
+          </p:nvSpPr>
+          <p:spPr>
+            <a:xfrm>
+              <a:off x="6962241" y="4055364"/>
+              <a:ext cx="65836" cy="32004"/>
+            </a:xfrm>
+            <a:prstGeom prst="rect">
+              <a:avLst/>
+            </a:prstGeom>
+            <a:solidFill>
+              <a:srgbClr val="FFFFFF"/>
+            </a:solidFill>
+            <a:ln>
+              <a:noFill/>
+            </a:ln>
+            <a:effectLst/>
+          </p:spPr>
+          <p:txBody>
+            <a:bodyPr rtlCol="0" anchor="ctr"/>
+            <a:lstStyle/>
+            <a:p>
+              <a:pPr algn="ctr"/>
+            </a:p>
+          </p:txBody>
+        </p:sp>
+        <p:sp>
+          <p:nvSpPr>
+            <p:cNvPr id="82" name="Oval 81"/>
+            <p:cNvSpPr/>
+            <p:nvPr/>
+          </p:nvSpPr>
+          <p:spPr>
+            <a:xfrm>
+              <a:off x="6812279" y="4407408"/>
+              <a:ext cx="365760" cy="365760"/>
+            </a:xfrm>
+            <a:prstGeom prst="ellipse">
+              <a:avLst/>
+            </a:prstGeom>
+            <a:solidFill>
+              <a:srgbClr val="1E8C8C"/>
+            </a:solidFill>
+            <a:ln w="12700">
+              <a:solidFill>
+                <a:srgbClr val="FFFFFF"/>
+              </a:solidFill>
+            </a:ln>
+            <a:effectLst/>
+          </p:spPr>
+          <p:txBody>
+            <a:bodyPr rtlCol="0" anchor="ctr"/>
+            <a:lstStyle/>
+            <a:p>
+              <a:pPr algn="ctr"/>
+            </a:p>
+          </p:txBody>
+        </p:sp>
+        <p:cxnSp>
+          <p:nvCxnSpPr>
+            <p:cNvPr id="83" name="Connector 82"/>
+            <p:cNvCxnSpPr/>
+            <p:nvPr/>
+          </p:nvCxnSpPr>
+          <p:spPr>
+            <a:xfrm>
+              <a:off x="6858000" y="4659782"/>
+              <a:ext cx="274320" cy="0"/>
+            </a:xfrm>
+            <a:prstGeom prst="line">
+              <a:avLst/>
+            </a:prstGeom>
+            <a:ln w="8890">
+              <a:solidFill>
+                <a:srgbClr val="6DB4B4"/>
+              </a:solidFill>
+            </a:ln>
+          </p:spPr>
+        </p:cxnSp>
+        <p:cxnSp>
+          <p:nvCxnSpPr>
+            <p:cNvPr id="84" name="Connector 83"/>
+            <p:cNvCxnSpPr/>
+            <p:nvPr/>
+          </p:nvCxnSpPr>
+          <p:spPr>
+            <a:xfrm flipV="1">
+              <a:off x="6925665" y="4453128"/>
+              <a:ext cx="0" cy="274320"/>
+            </a:xfrm>
+            <a:prstGeom prst="line">
+              <a:avLst/>
+            </a:prstGeom>
+            <a:ln w="8890">
+              <a:solidFill>
+                <a:srgbClr val="6DB4B4"/>
+              </a:solidFill>
+            </a:ln>
+          </p:spPr>
+        </p:cxnSp>
+        <p:cxnSp>
+          <p:nvCxnSpPr>
+            <p:cNvPr id="85" name="Connector 84"/>
+            <p:cNvCxnSpPr/>
+            <p:nvPr/>
+          </p:nvCxnSpPr>
+          <p:spPr>
+            <a:xfrm>
+              <a:off x="6858000" y="4590288"/>
+              <a:ext cx="274320" cy="0"/>
+            </a:xfrm>
+            <a:prstGeom prst="line">
+              <a:avLst/>
+            </a:prstGeom>
+            <a:ln w="8890">
+              <a:solidFill>
+                <a:srgbClr val="6DB4B4"/>
+              </a:solidFill>
+            </a:ln>
+          </p:spPr>
+        </p:cxnSp>
+        <p:cxnSp>
+          <p:nvCxnSpPr>
+            <p:cNvPr id="86" name="Connector 85"/>
+            <p:cNvCxnSpPr/>
+            <p:nvPr/>
+          </p:nvCxnSpPr>
+          <p:spPr>
+            <a:xfrm flipV="1">
+              <a:off x="6995159" y="4453128"/>
+              <a:ext cx="0" cy="274320"/>
+            </a:xfrm>
+            <a:prstGeom prst="line">
+              <a:avLst/>
+            </a:prstGeom>
+            <a:ln w="8890">
+              <a:solidFill>
+                <a:srgbClr val="6DB4B4"/>
+              </a:solidFill>
+            </a:ln>
+          </p:spPr>
+        </p:cxnSp>
+        <p:cxnSp>
+          <p:nvCxnSpPr>
+            <p:cNvPr id="87" name="Connector 86"/>
+            <p:cNvCxnSpPr/>
+            <p:nvPr/>
+          </p:nvCxnSpPr>
+          <p:spPr>
+            <a:xfrm>
+              <a:off x="6858000" y="4520793"/>
+              <a:ext cx="274320" cy="0"/>
+            </a:xfrm>
+            <a:prstGeom prst="line">
+              <a:avLst/>
+            </a:prstGeom>
+            <a:ln w="8890">
+              <a:solidFill>
+                <a:srgbClr val="6DB4B4"/>
+              </a:solidFill>
+            </a:ln>
+          </p:spPr>
+        </p:cxnSp>
+        <p:cxnSp>
+          <p:nvCxnSpPr>
+            <p:cNvPr id="88" name="Connector 87"/>
+            <p:cNvCxnSpPr/>
+            <p:nvPr/>
+          </p:nvCxnSpPr>
+          <p:spPr>
+            <a:xfrm flipV="1">
+              <a:off x="7064654" y="4453128"/>
+              <a:ext cx="0" cy="274320"/>
+            </a:xfrm>
+            <a:prstGeom prst="line">
+              <a:avLst/>
+            </a:prstGeom>
+            <a:ln w="8890">
+              <a:solidFill>
+                <a:srgbClr val="6DB4B4"/>
+              </a:solidFill>
+            </a:ln>
+          </p:spPr>
+        </p:cxnSp>
+        <p:sp>
+          <p:nvSpPr>
+            <p:cNvPr id="89" name="Rectangle 88"/>
+            <p:cNvSpPr/>
+            <p:nvPr/>
+          </p:nvSpPr>
+          <p:spPr>
+            <a:xfrm>
+              <a:off x="6962241" y="4750308"/>
+              <a:ext cx="65836" cy="32004"/>
+            </a:xfrm>
+            <a:prstGeom prst="rect">
+              <a:avLst/>
+            </a:prstGeom>
+            <a:solidFill>
+              <a:srgbClr val="FFFFFF"/>
+            </a:solidFill>
+            <a:ln>
+              <a:noFill/>
+            </a:ln>
+            <a:effectLst/>
+          </p:spPr>
+          <p:txBody>
+            <a:bodyPr rtlCol="0" anchor="ctr"/>
+            <a:lstStyle/>
+            <a:p>
+              <a:pPr algn="ctr"/>
+            </a:p>
+          </p:txBody>
+        </p:sp>
+        <p:sp>
+          <p:nvSpPr>
+            <p:cNvPr id="90" name="TextBox 89"/>
+            <p:cNvSpPr txBox="1"/>
+            <p:nvPr/>
+          </p:nvSpPr>
+          <p:spPr>
+            <a:xfrm>
+              <a:off x="7251192" y="3557016"/>
+              <a:ext cx="749808" cy="274320"/>
+            </a:xfrm>
+            <a:prstGeom prst="rect">
+              <a:avLst/>
+            </a:prstGeom>
+            <a:noFill/>
+          </p:spPr>
+          <p:txBody>
+            <a:bodyPr wrap="none" anchor="ctr" lIns="0" rIns="0" tIns="0" bIns="0">
+              <a:noAutofit/>
+            </a:bodyPr>
+            <a:lstStyle/>
+            <a:p>
+              <a:pPr algn="l"/>
+              <a:r>
+                <a:rPr sz="1600" b="1">
+                  <a:solidFill>
+                    <a:srgbClr val="3C4FA5"/>
+                  </a:solidFill>
+                  <a:latin typeface="Arial"/>
+                  <a:ea typeface="Arial"/>
+                </a:rPr>
+                <a:t>DRAM</a:t>
+              </a:r>
+            </a:p>
+          </p:txBody>
+        </p:sp>
+        <p:sp>
+          <p:nvSpPr>
+            <p:cNvPr id="91" name="TextBox 90"/>
+            <p:cNvSpPr txBox="1"/>
+            <p:nvPr/>
+          </p:nvSpPr>
+          <p:spPr>
+            <a:xfrm>
+              <a:off x="7251192" y="4654296"/>
+              <a:ext cx="749808" cy="274320"/>
+            </a:xfrm>
+            <a:prstGeom prst="rect">
+              <a:avLst/>
+            </a:prstGeom>
+            <a:noFill/>
+          </p:spPr>
+          <p:txBody>
+            <a:bodyPr wrap="none" anchor="ctr" lIns="0" rIns="0" tIns="0" bIns="0">
+              <a:noAutofit/>
+            </a:bodyPr>
+            <a:lstStyle/>
+            <a:p>
+              <a:pPr algn="l"/>
+              <a:r>
+                <a:rPr sz="1600" b="1">
+                  <a:solidFill>
+                    <a:srgbClr val="146B6B"/>
+                  </a:solidFill>
+                  <a:latin typeface="Arial"/>
+                  <a:ea typeface="Arial"/>
+                </a:rPr>
+                <a:t>NAND</a:t>
+              </a:r>
+            </a:p>
+          </p:txBody>
+        </p:sp>
+        <p:sp>
+          <p:nvSpPr>
+            <p:cNvPr id="92" name="TextBox 91"/>
+            <p:cNvSpPr txBox="1"/>
+            <p:nvPr/>
+          </p:nvSpPr>
+          <p:spPr>
+            <a:xfrm>
+              <a:off x="7891271" y="3355848"/>
+              <a:ext cx="2194560" cy="274320"/>
+            </a:xfrm>
+            <a:prstGeom prst="rect">
+              <a:avLst/>
+            </a:prstGeom>
+            <a:noFill/>
+          </p:spPr>
+          <p:txBody>
+            <a:bodyPr wrap="none" anchor="ctr" lIns="0" rIns="0" tIns="0" bIns="0">
+              <a:noAutofit/>
+            </a:bodyPr>
+            <a:lstStyle/>
+            <a:p>
+              <a:pPr algn="ctr"/>
+              <a:r>
+                <a:rPr sz="1600" b="1">
+                  <a:solidFill>
+                    <a:srgbClr val="1E8C8C"/>
+                  </a:solidFill>
+                  <a:latin typeface="Arial"/>
+                  <a:ea typeface="Arial"/>
+                </a:rPr>
+                <a:t>공용 BEOL 설비 Pool</a:t>
+              </a:r>
+            </a:p>
+          </p:txBody>
+        </p:sp>
+        <p:sp>
+          <p:nvSpPr>
+            <p:cNvPr id="93" name="Rounded Rectangle 92"/>
+            <p:cNvSpPr/>
+            <p:nvPr/>
+          </p:nvSpPr>
+          <p:spPr>
+            <a:xfrm>
+              <a:off x="8129015" y="3785616"/>
+              <a:ext cx="365760" cy="402336"/>
+            </a:xfrm>
+            <a:prstGeom prst="roundRect">
+              <a:avLst>
+                <a:gd name="adj" fmla="val 10000"/>
+              </a:avLst>
+            </a:prstGeom>
+            <a:solidFill>
+              <a:srgbClr val="3C4FA5"/>
+            </a:solidFill>
+            <a:ln w="10160">
+              <a:solidFill>
+                <a:srgbClr val="FFFFFF"/>
+              </a:solidFill>
+            </a:ln>
+            <a:effectLst/>
+          </p:spPr>
+          <p:txBody>
+            <a:bodyPr rtlCol="0" anchor="ctr"/>
+            <a:lstStyle/>
+            <a:p>
+              <a:pPr algn="ctr"/>
+            </a:p>
+          </p:txBody>
+        </p:sp>
+        <p:sp>
+          <p:nvSpPr>
+            <p:cNvPr id="94" name="Rounded Rectangle 93"/>
+            <p:cNvSpPr/>
+            <p:nvPr/>
+          </p:nvSpPr>
+          <p:spPr>
+            <a:xfrm>
+              <a:off x="8586216" y="3785616"/>
+              <a:ext cx="365760" cy="402336"/>
+            </a:xfrm>
+            <a:prstGeom prst="roundRect">
+              <a:avLst>
+                <a:gd name="adj" fmla="val 10000"/>
+              </a:avLst>
+            </a:prstGeom>
+            <a:solidFill>
+              <a:srgbClr val="3C4FA5"/>
+            </a:solidFill>
+            <a:ln w="10160">
+              <a:solidFill>
+                <a:srgbClr val="FFFFFF"/>
+              </a:solidFill>
+            </a:ln>
+            <a:effectLst/>
+          </p:spPr>
+          <p:txBody>
+            <a:bodyPr rtlCol="0" anchor="ctr"/>
+            <a:lstStyle/>
+            <a:p>
+              <a:pPr algn="ctr"/>
+            </a:p>
+          </p:txBody>
+        </p:sp>
+        <p:sp>
+          <p:nvSpPr>
+            <p:cNvPr id="95" name="Rounded Rectangle 94"/>
+            <p:cNvSpPr/>
+            <p:nvPr/>
+          </p:nvSpPr>
+          <p:spPr>
+            <a:xfrm>
+              <a:off x="9043416" y="3785616"/>
+              <a:ext cx="365760" cy="402336"/>
+            </a:xfrm>
+            <a:prstGeom prst="roundRect">
+              <a:avLst>
+                <a:gd name="adj" fmla="val 10000"/>
+              </a:avLst>
+            </a:prstGeom>
+            <a:solidFill>
+              <a:srgbClr val="1E8C8C"/>
+            </a:solidFill>
+            <a:ln w="10160">
+              <a:solidFill>
+                <a:srgbClr val="FFFFFF"/>
+              </a:solidFill>
+            </a:ln>
+            <a:effectLst/>
+          </p:spPr>
+          <p:txBody>
+            <a:bodyPr rtlCol="0" anchor="ctr"/>
+            <a:lstStyle/>
+            <a:p>
+              <a:pPr algn="ctr"/>
+            </a:p>
+          </p:txBody>
+        </p:sp>
+        <p:sp>
+          <p:nvSpPr>
+            <p:cNvPr id="96" name="Rectangle 95"/>
+            <p:cNvSpPr/>
+            <p:nvPr/>
+          </p:nvSpPr>
+          <p:spPr>
+            <a:xfrm>
+              <a:off x="9043416" y="3785616"/>
+              <a:ext cx="365760" cy="201168"/>
+            </a:xfrm>
+            <a:prstGeom prst="rect">
+              <a:avLst/>
+            </a:prstGeom>
+            <a:solidFill>
+              <a:srgbClr val="3C4FA5"/>
+            </a:solidFill>
+            <a:ln>
+              <a:noFill/>
+            </a:ln>
+            <a:effectLst/>
+          </p:spPr>
+          <p:txBody>
+            <a:bodyPr rtlCol="0" anchor="ctr"/>
+            <a:lstStyle/>
+            <a:p>
+              <a:pPr algn="ctr"/>
+            </a:p>
+          </p:txBody>
+        </p:sp>
+        <p:sp>
+          <p:nvSpPr>
+            <p:cNvPr id="97" name="Curved Down Arrow 96"/>
+            <p:cNvSpPr/>
+            <p:nvPr/>
+          </p:nvSpPr>
+          <p:spPr>
+            <a:xfrm>
+              <a:off x="9098280" y="3657600"/>
+              <a:ext cx="237744" cy="109728"/>
+            </a:xfrm>
+            <a:prstGeom prst="curvedDownArrow">
+              <a:avLst/>
+            </a:prstGeom>
+            <a:solidFill>
+              <a:srgbClr val="1A1A1A"/>
+            </a:solidFill>
+            <a:ln>
+              <a:noFill/>
+            </a:ln>
+            <a:effectLst/>
+          </p:spPr>
+          <p:txBody>
+            <a:bodyPr rtlCol="0" anchor="ctr"/>
+            <a:lstStyle/>
+            <a:p>
+              <a:pPr algn="ctr"/>
+            </a:p>
+          </p:txBody>
+        </p:sp>
+        <p:sp>
+          <p:nvSpPr>
+            <p:cNvPr id="98" name="Rounded Rectangle 97"/>
+            <p:cNvSpPr/>
+            <p:nvPr/>
+          </p:nvSpPr>
+          <p:spPr>
+            <a:xfrm>
+              <a:off x="9500616" y="3785616"/>
+              <a:ext cx="365760" cy="402336"/>
+            </a:xfrm>
+            <a:prstGeom prst="roundRect">
+              <a:avLst>
+                <a:gd name="adj" fmla="val 10000"/>
+              </a:avLst>
+            </a:prstGeom>
+            <a:solidFill>
+              <a:srgbClr val="1E8C8C"/>
+            </a:solidFill>
+            <a:ln w="10160">
+              <a:solidFill>
+                <a:srgbClr val="FFFFFF"/>
+              </a:solidFill>
+            </a:ln>
+            <a:effectLst/>
+          </p:spPr>
+          <p:txBody>
+            <a:bodyPr rtlCol="0" anchor="ctr"/>
+            <a:lstStyle/>
+            <a:p>
+              <a:pPr algn="ctr"/>
+            </a:p>
+          </p:txBody>
+        </p:sp>
+        <p:sp>
+          <p:nvSpPr>
+            <p:cNvPr id="99" name="Rounded Rectangle 98"/>
+            <p:cNvSpPr/>
+            <p:nvPr/>
+          </p:nvSpPr>
+          <p:spPr>
+            <a:xfrm>
+              <a:off x="8129015" y="4352544"/>
+              <a:ext cx="365760" cy="402336"/>
+            </a:xfrm>
+            <a:prstGeom prst="roundRect">
+              <a:avLst>
+                <a:gd name="adj" fmla="val 10000"/>
+              </a:avLst>
+            </a:prstGeom>
+            <a:solidFill>
+              <a:srgbClr val="3C4FA5"/>
+            </a:solidFill>
+            <a:ln w="10160">
+              <a:solidFill>
+                <a:srgbClr val="FFFFFF"/>
+              </a:solidFill>
+            </a:ln>
+            <a:effectLst/>
+          </p:spPr>
+          <p:txBody>
+            <a:bodyPr rtlCol="0" anchor="ctr"/>
+            <a:lstStyle/>
+            <a:p>
+              <a:pPr algn="ctr"/>
+            </a:p>
+          </p:txBody>
+        </p:sp>
+        <p:sp>
+          <p:nvSpPr>
+            <p:cNvPr id="100" name="Rounded Rectangle 99"/>
+            <p:cNvSpPr/>
+            <p:nvPr/>
+          </p:nvSpPr>
+          <p:spPr>
+            <a:xfrm>
+              <a:off x="8586216" y="4352544"/>
+              <a:ext cx="365760" cy="402336"/>
+            </a:xfrm>
+            <a:prstGeom prst="roundRect">
+              <a:avLst>
+                <a:gd name="adj" fmla="val 10000"/>
+              </a:avLst>
+            </a:prstGeom>
+            <a:solidFill>
+              <a:srgbClr val="1E8C8C"/>
+            </a:solidFill>
+            <a:ln w="10160">
+              <a:solidFill>
+                <a:srgbClr val="FFFFFF"/>
+              </a:solidFill>
+            </a:ln>
+            <a:effectLst/>
+          </p:spPr>
+          <p:txBody>
+            <a:bodyPr rtlCol="0" anchor="ctr"/>
+            <a:lstStyle/>
+            <a:p>
+              <a:pPr algn="ctr"/>
+            </a:p>
+          </p:txBody>
+        </p:sp>
+        <p:sp>
+          <p:nvSpPr>
+            <p:cNvPr id="101" name="Rectangle 100"/>
+            <p:cNvSpPr/>
+            <p:nvPr/>
+          </p:nvSpPr>
+          <p:spPr>
+            <a:xfrm>
+              <a:off x="8586216" y="4352544"/>
+              <a:ext cx="365760" cy="201168"/>
+            </a:xfrm>
+            <a:prstGeom prst="rect">
+              <a:avLst/>
+            </a:prstGeom>
+            <a:solidFill>
+              <a:srgbClr val="3C4FA5"/>
+            </a:solidFill>
+            <a:ln>
+              <a:noFill/>
+            </a:ln>
+            <a:effectLst/>
+          </p:spPr>
+          <p:txBody>
+            <a:bodyPr rtlCol="0" anchor="ctr"/>
+            <a:lstStyle/>
+            <a:p>
+              <a:pPr algn="ctr"/>
+            </a:p>
+          </p:txBody>
+        </p:sp>
+        <p:sp>
+          <p:nvSpPr>
+            <p:cNvPr id="102" name="Curved Down Arrow 101"/>
+            <p:cNvSpPr/>
+            <p:nvPr/>
+          </p:nvSpPr>
+          <p:spPr>
+            <a:xfrm>
+              <a:off x="8641080" y="4224528"/>
+              <a:ext cx="237744" cy="109728"/>
+            </a:xfrm>
+            <a:prstGeom prst="curvedDownArrow">
+              <a:avLst/>
+            </a:prstGeom>
+            <a:solidFill>
+              <a:srgbClr val="1A1A1A"/>
+            </a:solidFill>
+            <a:ln>
+              <a:noFill/>
+            </a:ln>
+            <a:effectLst/>
+          </p:spPr>
+          <p:txBody>
+            <a:bodyPr rtlCol="0" anchor="ctr"/>
+            <a:lstStyle/>
+            <a:p>
+              <a:pPr algn="ctr"/>
+            </a:p>
+          </p:txBody>
+        </p:sp>
+        <p:sp>
+          <p:nvSpPr>
+            <p:cNvPr id="103" name="Rounded Rectangle 102"/>
+            <p:cNvSpPr/>
+            <p:nvPr/>
+          </p:nvSpPr>
+          <p:spPr>
+            <a:xfrm>
+              <a:off x="9043416" y="4352544"/>
+              <a:ext cx="365760" cy="402336"/>
+            </a:xfrm>
+            <a:prstGeom prst="roundRect">
+              <a:avLst>
+                <a:gd name="adj" fmla="val 10000"/>
+              </a:avLst>
+            </a:prstGeom>
+            <a:solidFill>
+              <a:srgbClr val="1E8C8C"/>
+            </a:solidFill>
+            <a:ln w="10160">
+              <a:solidFill>
+                <a:srgbClr val="FFFFFF"/>
+              </a:solidFill>
+            </a:ln>
+            <a:effectLst/>
+          </p:spPr>
+          <p:txBody>
+            <a:bodyPr rtlCol="0" anchor="ctr"/>
+            <a:lstStyle/>
+            <a:p>
+              <a:pPr algn="ctr"/>
+            </a:p>
+          </p:txBody>
+        </p:sp>
+        <p:sp>
+          <p:nvSpPr>
+            <p:cNvPr id="104" name="Rounded Rectangle 103"/>
+            <p:cNvSpPr/>
+            <p:nvPr/>
+          </p:nvSpPr>
+          <p:spPr>
+            <a:xfrm>
+              <a:off x="9500616" y="4352544"/>
+              <a:ext cx="365760" cy="402336"/>
+            </a:xfrm>
+            <a:prstGeom prst="roundRect">
+              <a:avLst>
+                <a:gd name="adj" fmla="val 10000"/>
+              </a:avLst>
+            </a:prstGeom>
+            <a:solidFill>
+              <a:srgbClr val="1E8C8C"/>
+            </a:solidFill>
+            <a:ln w="10160">
+              <a:solidFill>
+                <a:srgbClr val="FFFFFF"/>
+              </a:solidFill>
+            </a:ln>
+            <a:effectLst/>
+          </p:spPr>
+          <p:txBody>
+            <a:bodyPr rtlCol="0" anchor="ctr"/>
+            <a:lstStyle/>
+            <a:p>
+              <a:pPr algn="ctr"/>
+            </a:p>
+          </p:txBody>
+        </p:sp>
+        <p:cxnSp>
+          <p:nvCxnSpPr>
+            <p:cNvPr id="105" name="Connector 104"/>
+            <p:cNvCxnSpPr/>
+            <p:nvPr/>
+          </p:nvCxnSpPr>
+          <p:spPr>
+            <a:xfrm>
+              <a:off x="10030967" y="4261104"/>
+              <a:ext cx="438913" cy="0"/>
+            </a:xfrm>
+            <a:prstGeom prst="line">
+              <a:avLst/>
+            </a:prstGeom>
+            <a:ln w="30480">
+              <a:solidFill>
+                <a:srgbClr val="1E8C8C"/>
+              </a:solidFill>
+              <a:tailEnd type="triangle" w="med" len="med"/>
+            </a:ln>
+          </p:spPr>
+        </p:cxnSp>
+        <p:sp>
+          <p:nvSpPr>
+            <p:cNvPr id="106" name="Oval 105"/>
+            <p:cNvSpPr/>
+            <p:nvPr/>
+          </p:nvSpPr>
+          <p:spPr>
+            <a:xfrm>
+              <a:off x="10506456" y="4306824"/>
+              <a:ext cx="877824" cy="274320"/>
+            </a:xfrm>
+            <a:prstGeom prst="ellipse">
+              <a:avLst/>
+            </a:prstGeom>
+            <a:solidFill>
+              <a:srgbClr val="1E8C8C"/>
+            </a:solidFill>
+            <a:ln w="12700">
+              <a:solidFill>
+                <a:srgbClr val="FFFFFF"/>
+              </a:solidFill>
+            </a:ln>
+            <a:effectLst/>
+          </p:spPr>
+          <p:txBody>
+            <a:bodyPr rtlCol="0" anchor="ctr"/>
+            <a:lstStyle/>
+            <a:p>
+              <a:pPr algn="ctr"/>
+            </a:p>
+          </p:txBody>
+        </p:sp>
+        <p:sp>
+          <p:nvSpPr>
+            <p:cNvPr id="107" name="Oval 106"/>
+            <p:cNvSpPr/>
+            <p:nvPr/>
+          </p:nvSpPr>
+          <p:spPr>
+            <a:xfrm>
+              <a:off x="10506456" y="4160520"/>
+              <a:ext cx="877824" cy="274320"/>
+            </a:xfrm>
+            <a:prstGeom prst="ellipse">
+              <a:avLst/>
+            </a:prstGeom>
+            <a:solidFill>
+              <a:srgbClr val="3C4FA5"/>
+            </a:solidFill>
+            <a:ln w="12700">
+              <a:solidFill>
+                <a:srgbClr val="FFFFFF"/>
+              </a:solidFill>
+            </a:ln>
+            <a:effectLst/>
+          </p:spPr>
+          <p:txBody>
+            <a:bodyPr rtlCol="0" anchor="ctr"/>
+            <a:lstStyle/>
+            <a:p>
+              <a:pPr algn="ctr"/>
+            </a:p>
+          </p:txBody>
+        </p:sp>
+        <p:sp>
+          <p:nvSpPr>
+            <p:cNvPr id="108" name="Oval 107"/>
+            <p:cNvSpPr/>
+            <p:nvPr/>
+          </p:nvSpPr>
+          <p:spPr>
+            <a:xfrm>
+              <a:off x="10506456" y="4014216"/>
+              <a:ext cx="877824" cy="274320"/>
+            </a:xfrm>
+            <a:prstGeom prst="ellipse">
+              <a:avLst/>
+            </a:prstGeom>
+            <a:solidFill>
+              <a:srgbClr val="6E56B0"/>
+            </a:solidFill>
+            <a:ln w="12700">
+              <a:solidFill>
+                <a:srgbClr val="FFFFFF"/>
+              </a:solidFill>
+            </a:ln>
+            <a:effectLst/>
+          </p:spPr>
+          <p:txBody>
+            <a:bodyPr rtlCol="0" anchor="ctr"/>
+            <a:lstStyle/>
+            <a:p>
+              <a:pPr algn="ctr"/>
+            </a:p>
+          </p:txBody>
+        </p:sp>
+        <p:sp>
+          <p:nvSpPr>
+            <p:cNvPr id="109" name="TextBox 108"/>
+            <p:cNvSpPr txBox="1"/>
+            <p:nvPr/>
+          </p:nvSpPr>
+          <p:spPr>
+            <a:xfrm>
+              <a:off x="10392156" y="3593592"/>
+              <a:ext cx="1106424" cy="274320"/>
+            </a:xfrm>
+            <a:prstGeom prst="rect">
+              <a:avLst/>
+            </a:prstGeom>
+            <a:noFill/>
+          </p:spPr>
+          <p:txBody>
+            <a:bodyPr wrap="none" anchor="ctr" lIns="0" rIns="0" tIns="0" bIns="0">
+              <a:noAutofit/>
+            </a:bodyPr>
+            <a:lstStyle/>
+            <a:p>
+              <a:pPr algn="ctr"/>
+              <a:r>
+                <a:rPr sz="1600" b="1">
+                  <a:solidFill>
+                    <a:srgbClr val="1E8C8C"/>
+                  </a:solidFill>
+                  <a:latin typeface="Arial"/>
+                  <a:ea typeface="Arial"/>
+                </a:rPr>
+                <a:t>Bonding</a:t>
+              </a:r>
+            </a:p>
+          </p:txBody>
+        </p:sp>
+      </p:grpSp>
+      <p:sp>
+        <p:nvSpPr>
+          <p:cNvPr id="110" name="Rectangle 109"/>
           <p:cNvSpPr/>
           <p:nvPr/>
         </p:nvSpPr>
@@ -30345,7 +32882,7 @@
       </p:sp>
       <p:sp>
         <p:nvSpPr>
-          <p:cNvPr id="27" name="TextBox 26"/>
+          <p:cNvPr id="111" name="TextBox 110"/>
           <p:cNvSpPr txBox="1"/>
           <p:nvPr/>
         </p:nvSpPr>
@@ -30395,7 +32932,7 @@
       </p:sp>
       <p:sp>
         <p:nvSpPr>
-          <p:cNvPr id="28" name="Rectangle 27"/>
+          <p:cNvPr id="112" name="Rectangle 111"/>
           <p:cNvSpPr/>
           <p:nvPr/>
         </p:nvSpPr>
@@ -30427,7 +32964,7 @@
       </p:sp>
       <p:sp>
         <p:nvSpPr>
-          <p:cNvPr id="29" name="TextBox 28"/>
+          <p:cNvPr id="113" name="TextBox 112"/>
           <p:cNvSpPr txBox="1"/>
           <p:nvPr/>
         </p:nvSpPr>
@@ -30477,7 +33014,7 @@
       </p:sp>
       <p:sp>
         <p:nvSpPr>
-          <p:cNvPr id="30" name="Rectangle 29"/>
+          <p:cNvPr id="114" name="Rectangle 113"/>
           <p:cNvSpPr/>
           <p:nvPr/>
         </p:nvSpPr>
@@ -30509,7 +33046,7 @@
       </p:sp>
       <p:sp>
         <p:nvSpPr>
-          <p:cNvPr id="31" name="TextBox 30"/>
+          <p:cNvPr id="115" name="TextBox 114"/>
           <p:cNvSpPr txBox="1"/>
           <p:nvPr/>
         </p:nvSpPr>
@@ -30559,7 +33096,7 @@
       </p:sp>
       <p:sp>
         <p:nvSpPr>
-          <p:cNvPr id="32" name="Rectangle 31"/>
+          <p:cNvPr id="116" name="Rectangle 115"/>
           <p:cNvSpPr/>
           <p:nvPr/>
         </p:nvSpPr>
@@ -30589,7 +33126,7 @@
       </p:sp>
       <p:sp>
         <p:nvSpPr>
-          <p:cNvPr id="33" name="Rectangle 32"/>
+          <p:cNvPr id="117" name="Rectangle 116"/>
           <p:cNvSpPr/>
           <p:nvPr/>
         </p:nvSpPr>
@@ -30619,7 +33156,7 @@
       </p:sp>
       <p:sp>
         <p:nvSpPr>
-          <p:cNvPr id="34" name="Oval 33"/>
+          <p:cNvPr id="118" name="Oval 117"/>
           <p:cNvSpPr/>
           <p:nvPr/>
         </p:nvSpPr>
@@ -30649,7 +33186,7 @@
       </p:sp>
       <p:sp>
         <p:nvSpPr>
-          <p:cNvPr id="35" name="TextBox 34"/>
+          <p:cNvPr id="119" name="TextBox 118"/>
           <p:cNvSpPr txBox="1"/>
           <p:nvPr/>
         </p:nvSpPr>
@@ -30689,7 +33226,7 @@
       </p:sp>
       <p:sp>
         <p:nvSpPr>
-          <p:cNvPr id="36" name="TextBox 35"/>
+          <p:cNvPr id="120" name="TextBox 119"/>
           <p:cNvSpPr txBox="1"/>
           <p:nvPr/>
         </p:nvSpPr>
@@ -30737,33 +33274,2275 @@
           </a:p>
         </p:txBody>
       </p:sp>
-      <p:pic>
-        <p:nvPicPr>
-          <p:cNvPr id="37" name="Picture 36" descr="c3_unif.png"/>
-          <p:cNvPicPr>
-            <a:picLocks noChangeAspect="1"/>
-          </p:cNvPicPr>
-          <p:nvPr/>
-        </p:nvPicPr>
-        <p:blipFill>
-          <a:blip r:embed="rId4"/>
-          <a:stretch>
-            <a:fillRect/>
-          </a:stretch>
-        </p:blipFill>
-        <p:spPr>
-          <a:xfrm>
-            <a:off x="12280392" y="3364992"/>
-            <a:ext cx="4846320" cy="1645919"/>
-          </a:xfrm>
-          <a:prstGeom prst="rect">
-            <a:avLst/>
-          </a:prstGeom>
-        </p:spPr>
-      </p:pic>
-      <p:sp>
-        <p:nvSpPr>
-          <p:cNvPr id="38" name="Rectangle 37"/>
+      <p:grpSp>
+        <p:nvGrpSpPr>
+          <p:cNvPr id="121" name="그림 3 설비 통일성 (도형)"/>
+          <p:cNvGrpSpPr/>
+          <p:nvPr/>
+        </p:nvGrpSpPr>
+        <p:grpSpPr>
+          <a:xfrm>
+            <a:off x="12298680" y="3355848"/>
+            <a:ext cx="4809744" cy="1565910"/>
+            <a:chOff x="12298680" y="3355848"/>
+            <a:chExt cx="4809744" cy="1565910"/>
+          </a:xfrm>
+        </p:grpSpPr>
+        <p:sp>
+          <p:nvSpPr>
+            <p:cNvPr id="122" name="TextBox 121"/>
+            <p:cNvSpPr txBox="1"/>
+            <p:nvPr/>
+          </p:nvSpPr>
+          <p:spPr>
+            <a:xfrm>
+              <a:off x="12897612" y="3355848"/>
+              <a:ext cx="749808" cy="274320"/>
+            </a:xfrm>
+            <a:prstGeom prst="rect">
+              <a:avLst/>
+            </a:prstGeom>
+            <a:noFill/>
+          </p:spPr>
+          <p:txBody>
+            <a:bodyPr wrap="none" anchor="ctr" lIns="0" rIns="0" tIns="0" bIns="0">
+              <a:noAutofit/>
+            </a:bodyPr>
+            <a:lstStyle/>
+            <a:p>
+              <a:pPr algn="ctr"/>
+              <a:r>
+                <a:rPr sz="1600" b="1">
+                  <a:solidFill>
+                    <a:srgbClr val="3C4FA5"/>
+                  </a:solidFill>
+                  <a:latin typeface="Arial"/>
+                  <a:ea typeface="Arial"/>
+                </a:rPr>
+                <a:t>DRAM</a:t>
+              </a:r>
+            </a:p>
+          </p:txBody>
+        </p:sp>
+        <p:sp>
+          <p:nvSpPr>
+            <p:cNvPr id="123" name="TextBox 122"/>
+            <p:cNvSpPr txBox="1"/>
+            <p:nvPr/>
+          </p:nvSpPr>
+          <p:spPr>
+            <a:xfrm>
+              <a:off x="13775436" y="3355848"/>
+              <a:ext cx="749808" cy="274320"/>
+            </a:xfrm>
+            <a:prstGeom prst="rect">
+              <a:avLst/>
+            </a:prstGeom>
+            <a:noFill/>
+          </p:spPr>
+          <p:txBody>
+            <a:bodyPr wrap="none" anchor="ctr" lIns="0" rIns="0" tIns="0" bIns="0">
+              <a:noAutofit/>
+            </a:bodyPr>
+            <a:lstStyle/>
+            <a:p>
+              <a:pPr algn="ctr"/>
+              <a:r>
+                <a:rPr sz="1600" b="1">
+                  <a:solidFill>
+                    <a:srgbClr val="146B6B"/>
+                  </a:solidFill>
+                  <a:latin typeface="Arial"/>
+                  <a:ea typeface="Arial"/>
+                </a:rPr>
+                <a:t>NAND</a:t>
+              </a:r>
+            </a:p>
+          </p:txBody>
+        </p:sp>
+        <p:sp>
+          <p:nvSpPr>
+            <p:cNvPr id="124" name="TextBox 123"/>
+            <p:cNvSpPr txBox="1"/>
+            <p:nvPr/>
+          </p:nvSpPr>
+          <p:spPr>
+            <a:xfrm>
+              <a:off x="15041880" y="3355848"/>
+              <a:ext cx="512064" cy="274320"/>
+            </a:xfrm>
+            <a:prstGeom prst="rect">
+              <a:avLst/>
+            </a:prstGeom>
+            <a:noFill/>
+          </p:spPr>
+          <p:txBody>
+            <a:bodyPr wrap="none" anchor="ctr" lIns="0" rIns="0" tIns="0" bIns="0">
+              <a:noAutofit/>
+            </a:bodyPr>
+            <a:lstStyle/>
+            <a:p>
+              <a:pPr algn="ctr"/>
+              <a:r>
+                <a:rPr sz="1600" b="1">
+                  <a:solidFill>
+                    <a:srgbClr val="6E56B0"/>
+                  </a:solidFill>
+                  <a:latin typeface="Arial"/>
+                  <a:ea typeface="Arial"/>
+                </a:rPr>
+                <a:t>공용</a:t>
+              </a:r>
+            </a:p>
+          </p:txBody>
+        </p:sp>
+        <p:sp>
+          <p:nvSpPr>
+            <p:cNvPr id="125" name="TextBox 124"/>
+            <p:cNvSpPr txBox="1"/>
+            <p:nvPr/>
+          </p:nvSpPr>
+          <p:spPr>
+            <a:xfrm>
+              <a:off x="12298680" y="3728466"/>
+              <a:ext cx="749808" cy="274320"/>
+            </a:xfrm>
+            <a:prstGeom prst="rect">
+              <a:avLst/>
+            </a:prstGeom>
+            <a:noFill/>
+          </p:spPr>
+          <p:txBody>
+            <a:bodyPr wrap="none" anchor="ctr" lIns="0" rIns="0" tIns="0" bIns="0">
+              <a:noAutofit/>
+            </a:bodyPr>
+            <a:lstStyle/>
+            <a:p>
+              <a:pPr algn="l"/>
+              <a:r>
+                <a:rPr sz="1600" b="1">
+                  <a:solidFill>
+                    <a:srgbClr val="1A1A1A"/>
+                  </a:solidFill>
+                  <a:latin typeface="Arial"/>
+                  <a:ea typeface="Arial"/>
+                </a:rPr>
+                <a:t>Depo</a:t>
+              </a:r>
+            </a:p>
+          </p:txBody>
+        </p:sp>
+        <p:sp>
+          <p:nvSpPr>
+            <p:cNvPr id="126" name="Rounded Rectangle 125"/>
+            <p:cNvSpPr/>
+            <p:nvPr/>
+          </p:nvSpPr>
+          <p:spPr>
+            <a:xfrm>
+              <a:off x="12883896" y="3751326"/>
+              <a:ext cx="365760" cy="228600"/>
+            </a:xfrm>
+            <a:prstGeom prst="roundRect">
+              <a:avLst>
+                <a:gd name="adj" fmla="val 16000"/>
+              </a:avLst>
+            </a:prstGeom>
+            <a:solidFill>
+              <a:srgbClr val="E9ECF8"/>
+            </a:solidFill>
+            <a:ln w="11430">
+              <a:solidFill>
+                <a:srgbClr val="3C4FA5"/>
+              </a:solidFill>
+            </a:ln>
+            <a:effectLst/>
+          </p:spPr>
+          <p:txBody>
+            <a:bodyPr rtlCol="0" anchor="ctr"/>
+            <a:lstStyle/>
+            <a:p>
+              <a:pPr algn="ctr"/>
+            </a:p>
+          </p:txBody>
+        </p:sp>
+        <p:sp>
+          <p:nvSpPr>
+            <p:cNvPr id="127" name="TextBox 126"/>
+            <p:cNvSpPr txBox="1"/>
+            <p:nvPr/>
+          </p:nvSpPr>
+          <p:spPr>
+            <a:xfrm>
+              <a:off x="12883896" y="3728466"/>
+              <a:ext cx="365760" cy="274320"/>
+            </a:xfrm>
+            <a:prstGeom prst="rect">
+              <a:avLst/>
+            </a:prstGeom>
+            <a:noFill/>
+          </p:spPr>
+          <p:txBody>
+            <a:bodyPr wrap="none" anchor="ctr" lIns="0" rIns="0" tIns="0" bIns="0">
+              <a:noAutofit/>
+            </a:bodyPr>
+            <a:lstStyle/>
+            <a:p>
+              <a:pPr algn="ctr"/>
+              <a:r>
+                <a:rPr sz="1600" b="0">
+                  <a:solidFill>
+                    <a:srgbClr val="3C4FA5"/>
+                  </a:solidFill>
+                  <a:latin typeface="Arial"/>
+                  <a:ea typeface="Arial"/>
+                </a:rPr>
+                <a:t>A1</a:t>
+              </a:r>
+            </a:p>
+          </p:txBody>
+        </p:sp>
+        <p:sp>
+          <p:nvSpPr>
+            <p:cNvPr id="128" name="Rounded Rectangle 127"/>
+            <p:cNvSpPr/>
+            <p:nvPr/>
+          </p:nvSpPr>
+          <p:spPr>
+            <a:xfrm>
+              <a:off x="13295376" y="3751326"/>
+              <a:ext cx="365760" cy="228600"/>
+            </a:xfrm>
+            <a:prstGeom prst="roundRect">
+              <a:avLst>
+                <a:gd name="adj" fmla="val 16000"/>
+              </a:avLst>
+            </a:prstGeom>
+            <a:solidFill>
+              <a:srgbClr val="E9ECF8"/>
+            </a:solidFill>
+            <a:ln w="11430">
+              <a:solidFill>
+                <a:srgbClr val="3C4FA5"/>
+              </a:solidFill>
+            </a:ln>
+            <a:effectLst/>
+          </p:spPr>
+          <p:txBody>
+            <a:bodyPr rtlCol="0" anchor="ctr"/>
+            <a:lstStyle/>
+            <a:p>
+              <a:pPr algn="ctr"/>
+            </a:p>
+          </p:txBody>
+        </p:sp>
+        <p:sp>
+          <p:nvSpPr>
+            <p:cNvPr id="129" name="TextBox 128"/>
+            <p:cNvSpPr txBox="1"/>
+            <p:nvPr/>
+          </p:nvSpPr>
+          <p:spPr>
+            <a:xfrm>
+              <a:off x="13295376" y="3728466"/>
+              <a:ext cx="365760" cy="274320"/>
+            </a:xfrm>
+            <a:prstGeom prst="rect">
+              <a:avLst/>
+            </a:prstGeom>
+            <a:noFill/>
+          </p:spPr>
+          <p:txBody>
+            <a:bodyPr wrap="none" anchor="ctr" lIns="0" rIns="0" tIns="0" bIns="0">
+              <a:noAutofit/>
+            </a:bodyPr>
+            <a:lstStyle/>
+            <a:p>
+              <a:pPr algn="ctr"/>
+              <a:r>
+                <a:rPr sz="1600" b="0">
+                  <a:solidFill>
+                    <a:srgbClr val="3C4FA5"/>
+                  </a:solidFill>
+                  <a:latin typeface="Arial"/>
+                  <a:ea typeface="Arial"/>
+                </a:rPr>
+                <a:t>B4</a:t>
+              </a:r>
+            </a:p>
+          </p:txBody>
+        </p:sp>
+        <p:sp>
+          <p:nvSpPr>
+            <p:cNvPr id="130" name="Rounded Rectangle 129"/>
+            <p:cNvSpPr/>
+            <p:nvPr/>
+          </p:nvSpPr>
+          <p:spPr>
+            <a:xfrm>
+              <a:off x="13761720" y="3751326"/>
+              <a:ext cx="365760" cy="228600"/>
+            </a:xfrm>
+            <a:prstGeom prst="roundRect">
+              <a:avLst>
+                <a:gd name="adj" fmla="val 16000"/>
+              </a:avLst>
+            </a:prstGeom>
+            <a:solidFill>
+              <a:srgbClr val="E3F3F1"/>
+            </a:solidFill>
+            <a:ln w="11430">
+              <a:solidFill>
+                <a:srgbClr val="1E8C8C"/>
+              </a:solidFill>
+            </a:ln>
+            <a:effectLst/>
+          </p:spPr>
+          <p:txBody>
+            <a:bodyPr rtlCol="0" anchor="ctr"/>
+            <a:lstStyle/>
+            <a:p>
+              <a:pPr algn="ctr"/>
+            </a:p>
+          </p:txBody>
+        </p:sp>
+        <p:sp>
+          <p:nvSpPr>
+            <p:cNvPr id="131" name="TextBox 130"/>
+            <p:cNvSpPr txBox="1"/>
+            <p:nvPr/>
+          </p:nvSpPr>
+          <p:spPr>
+            <a:xfrm>
+              <a:off x="13761720" y="3728466"/>
+              <a:ext cx="365760" cy="274320"/>
+            </a:xfrm>
+            <a:prstGeom prst="rect">
+              <a:avLst/>
+            </a:prstGeom>
+            <a:noFill/>
+          </p:spPr>
+          <p:txBody>
+            <a:bodyPr wrap="none" anchor="ctr" lIns="0" rIns="0" tIns="0" bIns="0">
+              <a:noAutofit/>
+            </a:bodyPr>
+            <a:lstStyle/>
+            <a:p>
+              <a:pPr algn="ctr"/>
+              <a:r>
+                <a:rPr sz="1600" b="0">
+                  <a:solidFill>
+                    <a:srgbClr val="146B6B"/>
+                  </a:solidFill>
+                  <a:latin typeface="Arial"/>
+                  <a:ea typeface="Arial"/>
+                </a:rPr>
+                <a:t>K3</a:t>
+              </a:r>
+            </a:p>
+          </p:txBody>
+        </p:sp>
+        <p:sp>
+          <p:nvSpPr>
+            <p:cNvPr id="132" name="Rounded Rectangle 131"/>
+            <p:cNvSpPr/>
+            <p:nvPr/>
+          </p:nvSpPr>
+          <p:spPr>
+            <a:xfrm>
+              <a:off x="14173200" y="3751326"/>
+              <a:ext cx="365760" cy="228600"/>
+            </a:xfrm>
+            <a:prstGeom prst="roundRect">
+              <a:avLst>
+                <a:gd name="adj" fmla="val 16000"/>
+              </a:avLst>
+            </a:prstGeom>
+            <a:solidFill>
+              <a:srgbClr val="E3F3F1"/>
+            </a:solidFill>
+            <a:ln w="11430">
+              <a:solidFill>
+                <a:srgbClr val="1E8C8C"/>
+              </a:solidFill>
+            </a:ln>
+            <a:effectLst/>
+          </p:spPr>
+          <p:txBody>
+            <a:bodyPr rtlCol="0" anchor="ctr"/>
+            <a:lstStyle/>
+            <a:p>
+              <a:pPr algn="ctr"/>
+            </a:p>
+          </p:txBody>
+        </p:sp>
+        <p:sp>
+          <p:nvSpPr>
+            <p:cNvPr id="133" name="TextBox 132"/>
+            <p:cNvSpPr txBox="1"/>
+            <p:nvPr/>
+          </p:nvSpPr>
+          <p:spPr>
+            <a:xfrm>
+              <a:off x="14173200" y="3728466"/>
+              <a:ext cx="365760" cy="274320"/>
+            </a:xfrm>
+            <a:prstGeom prst="rect">
+              <a:avLst/>
+            </a:prstGeom>
+            <a:noFill/>
+          </p:spPr>
+          <p:txBody>
+            <a:bodyPr wrap="none" anchor="ctr" lIns="0" rIns="0" tIns="0" bIns="0">
+              <a:noAutofit/>
+            </a:bodyPr>
+            <a:lstStyle/>
+            <a:p>
+              <a:pPr algn="ctr"/>
+              <a:r>
+                <a:rPr sz="1600" b="0">
+                  <a:solidFill>
+                    <a:srgbClr val="146B6B"/>
+                  </a:solidFill>
+                  <a:latin typeface="Arial"/>
+                  <a:ea typeface="Arial"/>
+                </a:rPr>
+                <a:t>A2</a:t>
+              </a:r>
+            </a:p>
+          </p:txBody>
+        </p:sp>
+        <p:sp>
+          <p:nvSpPr>
+            <p:cNvPr id="134" name="Right Arrow 133"/>
+            <p:cNvSpPr/>
+            <p:nvPr/>
+          </p:nvSpPr>
+          <p:spPr>
+            <a:xfrm>
+              <a:off x="14639543" y="3774186"/>
+              <a:ext cx="329184" cy="182880"/>
+            </a:xfrm>
+            <a:prstGeom prst="rightArrow">
+              <a:avLst/>
+            </a:prstGeom>
+            <a:solidFill>
+              <a:srgbClr val="D3CAEE"/>
+            </a:solidFill>
+            <a:ln>
+              <a:noFill/>
+            </a:ln>
+            <a:effectLst/>
+          </p:spPr>
+          <p:txBody>
+            <a:bodyPr rtlCol="0" anchor="ctr"/>
+            <a:lstStyle/>
+            <a:p>
+              <a:pPr algn="ctr"/>
+            </a:p>
+          </p:txBody>
+        </p:sp>
+        <p:sp>
+          <p:nvSpPr>
+            <p:cNvPr id="135" name="Rounded Rectangle 134"/>
+            <p:cNvSpPr/>
+            <p:nvPr/>
+          </p:nvSpPr>
+          <p:spPr>
+            <a:xfrm>
+              <a:off x="15169896" y="3687318"/>
+              <a:ext cx="365760" cy="228600"/>
+            </a:xfrm>
+            <a:prstGeom prst="roundRect">
+              <a:avLst>
+                <a:gd name="adj" fmla="val 16000"/>
+              </a:avLst>
+            </a:prstGeom>
+            <a:solidFill>
+              <a:srgbClr val="D3CAEE"/>
+            </a:solidFill>
+            <a:ln w="10160">
+              <a:solidFill>
+                <a:srgbClr val="FFFFFF"/>
+              </a:solidFill>
+            </a:ln>
+            <a:effectLst/>
+          </p:spPr>
+          <p:txBody>
+            <a:bodyPr rtlCol="0" anchor="ctr"/>
+            <a:lstStyle/>
+            <a:p>
+              <a:pPr algn="ctr"/>
+            </a:p>
+          </p:txBody>
+        </p:sp>
+        <p:sp>
+          <p:nvSpPr>
+            <p:cNvPr id="136" name="Rounded Rectangle 135"/>
+            <p:cNvSpPr/>
+            <p:nvPr/>
+          </p:nvSpPr>
+          <p:spPr>
+            <a:xfrm>
+              <a:off x="15115032" y="3719322"/>
+              <a:ext cx="365760" cy="228600"/>
+            </a:xfrm>
+            <a:prstGeom prst="roundRect">
+              <a:avLst>
+                <a:gd name="adj" fmla="val 16000"/>
+              </a:avLst>
+            </a:prstGeom>
+            <a:solidFill>
+              <a:srgbClr val="A797D6"/>
+            </a:solidFill>
+            <a:ln w="10160">
+              <a:solidFill>
+                <a:srgbClr val="FFFFFF"/>
+              </a:solidFill>
+            </a:ln>
+            <a:effectLst/>
+          </p:spPr>
+          <p:txBody>
+            <a:bodyPr rtlCol="0" anchor="ctr"/>
+            <a:lstStyle/>
+            <a:p>
+              <a:pPr algn="ctr"/>
+            </a:p>
+          </p:txBody>
+        </p:sp>
+        <p:sp>
+          <p:nvSpPr>
+            <p:cNvPr id="137" name="Rounded Rectangle 136"/>
+            <p:cNvSpPr/>
+            <p:nvPr/>
+          </p:nvSpPr>
+          <p:spPr>
+            <a:xfrm>
+              <a:off x="15060167" y="3751326"/>
+              <a:ext cx="365760" cy="228600"/>
+            </a:xfrm>
+            <a:prstGeom prst="roundRect">
+              <a:avLst>
+                <a:gd name="adj" fmla="val 16000"/>
+              </a:avLst>
+            </a:prstGeom>
+            <a:solidFill>
+              <a:srgbClr val="6E56B0"/>
+            </a:solidFill>
+            <a:ln w="11430">
+              <a:solidFill>
+                <a:srgbClr val="FFFFFF"/>
+              </a:solidFill>
+            </a:ln>
+            <a:effectLst/>
+          </p:spPr>
+          <p:txBody>
+            <a:bodyPr rtlCol="0" anchor="ctr"/>
+            <a:lstStyle/>
+            <a:p>
+              <a:pPr algn="ctr"/>
+            </a:p>
+          </p:txBody>
+        </p:sp>
+        <p:sp>
+          <p:nvSpPr>
+            <p:cNvPr id="138" name="TextBox 137"/>
+            <p:cNvSpPr txBox="1"/>
+            <p:nvPr/>
+          </p:nvSpPr>
+          <p:spPr>
+            <a:xfrm>
+              <a:off x="15060167" y="3728466"/>
+              <a:ext cx="365760" cy="274320"/>
+            </a:xfrm>
+            <a:prstGeom prst="rect">
+              <a:avLst/>
+            </a:prstGeom>
+            <a:noFill/>
+          </p:spPr>
+          <p:txBody>
+            <a:bodyPr wrap="none" anchor="ctr" lIns="0" rIns="0" tIns="0" bIns="0">
+              <a:noAutofit/>
+            </a:bodyPr>
+            <a:lstStyle/>
+            <a:p>
+              <a:pPr algn="ctr"/>
+              <a:r>
+                <a:rPr sz="1600" b="1">
+                  <a:solidFill>
+                    <a:srgbClr val="FFFFFF"/>
+                  </a:solidFill>
+                  <a:latin typeface="Arial"/>
+                  <a:ea typeface="Arial"/>
+                </a:rPr>
+                <a:t>P1</a:t>
+              </a:r>
+            </a:p>
+          </p:txBody>
+        </p:sp>
+        <p:sp>
+          <p:nvSpPr>
+            <p:cNvPr id="139" name="TextBox 138"/>
+            <p:cNvSpPr txBox="1"/>
+            <p:nvPr/>
+          </p:nvSpPr>
+          <p:spPr>
+            <a:xfrm>
+              <a:off x="15736824" y="3728466"/>
+              <a:ext cx="987552" cy="274320"/>
+            </a:xfrm>
+            <a:prstGeom prst="rect">
+              <a:avLst/>
+            </a:prstGeom>
+            <a:noFill/>
+          </p:spPr>
+          <p:txBody>
+            <a:bodyPr wrap="none" anchor="ctr" lIns="0" rIns="0" tIns="0" bIns="0">
+              <a:noAutofit/>
+            </a:bodyPr>
+            <a:lstStyle/>
+            <a:p>
+              <a:pPr algn="l"/>
+              <a:r>
+                <a:rPr sz="1600" b="1">
+                  <a:solidFill>
+                    <a:srgbClr val="6E56B0"/>
+                  </a:solidFill>
+                  <a:latin typeface="Arial"/>
+                  <a:ea typeface="Arial"/>
+                </a:rPr>
+                <a:t>레시피 공유</a:t>
+              </a:r>
+            </a:p>
+          </p:txBody>
+        </p:sp>
+        <p:cxnSp>
+          <p:nvCxnSpPr>
+            <p:cNvPr id="140" name="Connector 139"/>
+            <p:cNvCxnSpPr/>
+            <p:nvPr/>
+          </p:nvCxnSpPr>
+          <p:spPr>
+            <a:xfrm>
+              <a:off x="12298680" y="4018788"/>
+              <a:ext cx="4809744" cy="0"/>
+            </a:xfrm>
+            <a:prstGeom prst="line">
+              <a:avLst/>
+            </a:prstGeom>
+            <a:ln w="8890">
+              <a:solidFill>
+                <a:srgbClr val="D9D9D9"/>
+              </a:solidFill>
+            </a:ln>
+          </p:spPr>
+        </p:cxnSp>
+        <p:sp>
+          <p:nvSpPr>
+            <p:cNvPr id="141" name="TextBox 140"/>
+            <p:cNvSpPr txBox="1"/>
+            <p:nvPr/>
+          </p:nvSpPr>
+          <p:spPr>
+            <a:xfrm>
+              <a:off x="12298680" y="4034790"/>
+              <a:ext cx="749808" cy="274320"/>
+            </a:xfrm>
+            <a:prstGeom prst="rect">
+              <a:avLst/>
+            </a:prstGeom>
+            <a:noFill/>
+          </p:spPr>
+          <p:txBody>
+            <a:bodyPr wrap="none" anchor="ctr" lIns="0" rIns="0" tIns="0" bIns="0">
+              <a:noAutofit/>
+            </a:bodyPr>
+            <a:lstStyle/>
+            <a:p>
+              <a:pPr algn="l"/>
+              <a:r>
+                <a:rPr sz="1600" b="1">
+                  <a:solidFill>
+                    <a:srgbClr val="1A1A1A"/>
+                  </a:solidFill>
+                  <a:latin typeface="Arial"/>
+                  <a:ea typeface="Arial"/>
+                </a:rPr>
+                <a:t>Etch</a:t>
+              </a:r>
+            </a:p>
+          </p:txBody>
+        </p:sp>
+        <p:sp>
+          <p:nvSpPr>
+            <p:cNvPr id="142" name="Rounded Rectangle 141"/>
+            <p:cNvSpPr/>
+            <p:nvPr/>
+          </p:nvSpPr>
+          <p:spPr>
+            <a:xfrm>
+              <a:off x="12883896" y="4057650"/>
+              <a:ext cx="365760" cy="228600"/>
+            </a:xfrm>
+            <a:prstGeom prst="roundRect">
+              <a:avLst>
+                <a:gd name="adj" fmla="val 16000"/>
+              </a:avLst>
+            </a:prstGeom>
+            <a:solidFill>
+              <a:srgbClr val="E9ECF8"/>
+            </a:solidFill>
+            <a:ln w="11430">
+              <a:solidFill>
+                <a:srgbClr val="3C4FA5"/>
+              </a:solidFill>
+            </a:ln>
+            <a:effectLst/>
+          </p:spPr>
+          <p:txBody>
+            <a:bodyPr rtlCol="0" anchor="ctr"/>
+            <a:lstStyle/>
+            <a:p>
+              <a:pPr algn="ctr"/>
+            </a:p>
+          </p:txBody>
+        </p:sp>
+        <p:sp>
+          <p:nvSpPr>
+            <p:cNvPr id="143" name="TextBox 142"/>
+            <p:cNvSpPr txBox="1"/>
+            <p:nvPr/>
+          </p:nvSpPr>
+          <p:spPr>
+            <a:xfrm>
+              <a:off x="12883896" y="4034790"/>
+              <a:ext cx="365760" cy="274320"/>
+            </a:xfrm>
+            <a:prstGeom prst="rect">
+              <a:avLst/>
+            </a:prstGeom>
+            <a:noFill/>
+          </p:spPr>
+          <p:txBody>
+            <a:bodyPr wrap="none" anchor="ctr" lIns="0" rIns="0" tIns="0" bIns="0">
+              <a:noAutofit/>
+            </a:bodyPr>
+            <a:lstStyle/>
+            <a:p>
+              <a:pPr algn="ctr"/>
+              <a:r>
+                <a:rPr sz="1600" b="0">
+                  <a:solidFill>
+                    <a:srgbClr val="3C4FA5"/>
+                  </a:solidFill>
+                  <a:latin typeface="Arial"/>
+                  <a:ea typeface="Arial"/>
+                </a:rPr>
+                <a:t>C2</a:t>
+              </a:r>
+            </a:p>
+          </p:txBody>
+        </p:sp>
+        <p:sp>
+          <p:nvSpPr>
+            <p:cNvPr id="144" name="Rounded Rectangle 143"/>
+            <p:cNvSpPr/>
+            <p:nvPr/>
+          </p:nvSpPr>
+          <p:spPr>
+            <a:xfrm>
+              <a:off x="13295376" y="4057650"/>
+              <a:ext cx="365760" cy="228600"/>
+            </a:xfrm>
+            <a:prstGeom prst="roundRect">
+              <a:avLst>
+                <a:gd name="adj" fmla="val 16000"/>
+              </a:avLst>
+            </a:prstGeom>
+            <a:solidFill>
+              <a:srgbClr val="E9ECF8"/>
+            </a:solidFill>
+            <a:ln w="11430">
+              <a:solidFill>
+                <a:srgbClr val="3C4FA5"/>
+              </a:solidFill>
+            </a:ln>
+            <a:effectLst/>
+          </p:spPr>
+          <p:txBody>
+            <a:bodyPr rtlCol="0" anchor="ctr"/>
+            <a:lstStyle/>
+            <a:p>
+              <a:pPr algn="ctr"/>
+            </a:p>
+          </p:txBody>
+        </p:sp>
+        <p:sp>
+          <p:nvSpPr>
+            <p:cNvPr id="145" name="TextBox 144"/>
+            <p:cNvSpPr txBox="1"/>
+            <p:nvPr/>
+          </p:nvSpPr>
+          <p:spPr>
+            <a:xfrm>
+              <a:off x="13295376" y="4034790"/>
+              <a:ext cx="365760" cy="274320"/>
+            </a:xfrm>
+            <a:prstGeom prst="rect">
+              <a:avLst/>
+            </a:prstGeom>
+            <a:noFill/>
+          </p:spPr>
+          <p:txBody>
+            <a:bodyPr wrap="none" anchor="ctr" lIns="0" rIns="0" tIns="0" bIns="0">
+              <a:noAutofit/>
+            </a:bodyPr>
+            <a:lstStyle/>
+            <a:p>
+              <a:pPr algn="ctr"/>
+              <a:r>
+                <a:rPr sz="1600" b="0">
+                  <a:solidFill>
+                    <a:srgbClr val="3C4FA5"/>
+                  </a:solidFill>
+                  <a:latin typeface="Arial"/>
+                  <a:ea typeface="Arial"/>
+                </a:rPr>
+                <a:t>D3</a:t>
+              </a:r>
+            </a:p>
+          </p:txBody>
+        </p:sp>
+        <p:sp>
+          <p:nvSpPr>
+            <p:cNvPr id="146" name="Rounded Rectangle 145"/>
+            <p:cNvSpPr/>
+            <p:nvPr/>
+          </p:nvSpPr>
+          <p:spPr>
+            <a:xfrm>
+              <a:off x="13761720" y="4057650"/>
+              <a:ext cx="365760" cy="228600"/>
+            </a:xfrm>
+            <a:prstGeom prst="roundRect">
+              <a:avLst>
+                <a:gd name="adj" fmla="val 16000"/>
+              </a:avLst>
+            </a:prstGeom>
+            <a:solidFill>
+              <a:srgbClr val="E3F3F1"/>
+            </a:solidFill>
+            <a:ln w="11430">
+              <a:solidFill>
+                <a:srgbClr val="1E8C8C"/>
+              </a:solidFill>
+            </a:ln>
+            <a:effectLst/>
+          </p:spPr>
+          <p:txBody>
+            <a:bodyPr rtlCol="0" anchor="ctr"/>
+            <a:lstStyle/>
+            <a:p>
+              <a:pPr algn="ctr"/>
+            </a:p>
+          </p:txBody>
+        </p:sp>
+        <p:sp>
+          <p:nvSpPr>
+            <p:cNvPr id="147" name="TextBox 146"/>
+            <p:cNvSpPr txBox="1"/>
+            <p:nvPr/>
+          </p:nvSpPr>
+          <p:spPr>
+            <a:xfrm>
+              <a:off x="13761720" y="4034790"/>
+              <a:ext cx="365760" cy="274320"/>
+            </a:xfrm>
+            <a:prstGeom prst="rect">
+              <a:avLst/>
+            </a:prstGeom>
+            <a:noFill/>
+          </p:spPr>
+          <p:txBody>
+            <a:bodyPr wrap="none" anchor="ctr" lIns="0" rIns="0" tIns="0" bIns="0">
+              <a:noAutofit/>
+            </a:bodyPr>
+            <a:lstStyle/>
+            <a:p>
+              <a:pPr algn="ctr"/>
+              <a:r>
+                <a:rPr sz="1600" b="0">
+                  <a:solidFill>
+                    <a:srgbClr val="146B6B"/>
+                  </a:solidFill>
+                  <a:latin typeface="Arial"/>
+                  <a:ea typeface="Arial"/>
+                </a:rPr>
+                <a:t>L1</a:t>
+              </a:r>
+            </a:p>
+          </p:txBody>
+        </p:sp>
+        <p:sp>
+          <p:nvSpPr>
+            <p:cNvPr id="148" name="Rounded Rectangle 147"/>
+            <p:cNvSpPr/>
+            <p:nvPr/>
+          </p:nvSpPr>
+          <p:spPr>
+            <a:xfrm>
+              <a:off x="14173200" y="4057650"/>
+              <a:ext cx="365760" cy="228600"/>
+            </a:xfrm>
+            <a:prstGeom prst="roundRect">
+              <a:avLst>
+                <a:gd name="adj" fmla="val 16000"/>
+              </a:avLst>
+            </a:prstGeom>
+            <a:solidFill>
+              <a:srgbClr val="E3F3F1"/>
+            </a:solidFill>
+            <a:ln w="11430">
+              <a:solidFill>
+                <a:srgbClr val="1E8C8C"/>
+              </a:solidFill>
+            </a:ln>
+            <a:effectLst/>
+          </p:spPr>
+          <p:txBody>
+            <a:bodyPr rtlCol="0" anchor="ctr"/>
+            <a:lstStyle/>
+            <a:p>
+              <a:pPr algn="ctr"/>
+            </a:p>
+          </p:txBody>
+        </p:sp>
+        <p:sp>
+          <p:nvSpPr>
+            <p:cNvPr id="149" name="TextBox 148"/>
+            <p:cNvSpPr txBox="1"/>
+            <p:nvPr/>
+          </p:nvSpPr>
+          <p:spPr>
+            <a:xfrm>
+              <a:off x="14173200" y="4034790"/>
+              <a:ext cx="365760" cy="274320"/>
+            </a:xfrm>
+            <a:prstGeom prst="rect">
+              <a:avLst/>
+            </a:prstGeom>
+            <a:noFill/>
+          </p:spPr>
+          <p:txBody>
+            <a:bodyPr wrap="none" anchor="ctr" lIns="0" rIns="0" tIns="0" bIns="0">
+              <a:noAutofit/>
+            </a:bodyPr>
+            <a:lstStyle/>
+            <a:p>
+              <a:pPr algn="ctr"/>
+              <a:r>
+                <a:rPr sz="1600" b="0">
+                  <a:solidFill>
+                    <a:srgbClr val="146B6B"/>
+                  </a:solidFill>
+                  <a:latin typeface="Arial"/>
+                  <a:ea typeface="Arial"/>
+                </a:rPr>
+                <a:t>C6</a:t>
+              </a:r>
+            </a:p>
+          </p:txBody>
+        </p:sp>
+        <p:sp>
+          <p:nvSpPr>
+            <p:cNvPr id="150" name="Right Arrow 149"/>
+            <p:cNvSpPr/>
+            <p:nvPr/>
+          </p:nvSpPr>
+          <p:spPr>
+            <a:xfrm>
+              <a:off x="14639543" y="4080510"/>
+              <a:ext cx="329184" cy="182880"/>
+            </a:xfrm>
+            <a:prstGeom prst="rightArrow">
+              <a:avLst/>
+            </a:prstGeom>
+            <a:solidFill>
+              <a:srgbClr val="D3CAEE"/>
+            </a:solidFill>
+            <a:ln>
+              <a:noFill/>
+            </a:ln>
+            <a:effectLst/>
+          </p:spPr>
+          <p:txBody>
+            <a:bodyPr rtlCol="0" anchor="ctr"/>
+            <a:lstStyle/>
+            <a:p>
+              <a:pPr algn="ctr"/>
+            </a:p>
+          </p:txBody>
+        </p:sp>
+        <p:sp>
+          <p:nvSpPr>
+            <p:cNvPr id="151" name="Rounded Rectangle 150"/>
+            <p:cNvSpPr/>
+            <p:nvPr/>
+          </p:nvSpPr>
+          <p:spPr>
+            <a:xfrm>
+              <a:off x="15169896" y="3993642"/>
+              <a:ext cx="365760" cy="228600"/>
+            </a:xfrm>
+            <a:prstGeom prst="roundRect">
+              <a:avLst>
+                <a:gd name="adj" fmla="val 16000"/>
+              </a:avLst>
+            </a:prstGeom>
+            <a:solidFill>
+              <a:srgbClr val="D3CAEE"/>
+            </a:solidFill>
+            <a:ln w="10160">
+              <a:solidFill>
+                <a:srgbClr val="FFFFFF"/>
+              </a:solidFill>
+            </a:ln>
+            <a:effectLst/>
+          </p:spPr>
+          <p:txBody>
+            <a:bodyPr rtlCol="0" anchor="ctr"/>
+            <a:lstStyle/>
+            <a:p>
+              <a:pPr algn="ctr"/>
+            </a:p>
+          </p:txBody>
+        </p:sp>
+        <p:sp>
+          <p:nvSpPr>
+            <p:cNvPr id="152" name="Rounded Rectangle 151"/>
+            <p:cNvSpPr/>
+            <p:nvPr/>
+          </p:nvSpPr>
+          <p:spPr>
+            <a:xfrm>
+              <a:off x="15115032" y="4025646"/>
+              <a:ext cx="365760" cy="228600"/>
+            </a:xfrm>
+            <a:prstGeom prst="roundRect">
+              <a:avLst>
+                <a:gd name="adj" fmla="val 16000"/>
+              </a:avLst>
+            </a:prstGeom>
+            <a:solidFill>
+              <a:srgbClr val="A797D6"/>
+            </a:solidFill>
+            <a:ln w="10160">
+              <a:solidFill>
+                <a:srgbClr val="FFFFFF"/>
+              </a:solidFill>
+            </a:ln>
+            <a:effectLst/>
+          </p:spPr>
+          <p:txBody>
+            <a:bodyPr rtlCol="0" anchor="ctr"/>
+            <a:lstStyle/>
+            <a:p>
+              <a:pPr algn="ctr"/>
+            </a:p>
+          </p:txBody>
+        </p:sp>
+        <p:sp>
+          <p:nvSpPr>
+            <p:cNvPr id="153" name="Rounded Rectangle 152"/>
+            <p:cNvSpPr/>
+            <p:nvPr/>
+          </p:nvSpPr>
+          <p:spPr>
+            <a:xfrm>
+              <a:off x="15060167" y="4057650"/>
+              <a:ext cx="365760" cy="228600"/>
+            </a:xfrm>
+            <a:prstGeom prst="roundRect">
+              <a:avLst>
+                <a:gd name="adj" fmla="val 16000"/>
+              </a:avLst>
+            </a:prstGeom>
+            <a:solidFill>
+              <a:srgbClr val="6E56B0"/>
+            </a:solidFill>
+            <a:ln w="11430">
+              <a:solidFill>
+                <a:srgbClr val="FFFFFF"/>
+              </a:solidFill>
+            </a:ln>
+            <a:effectLst/>
+          </p:spPr>
+          <p:txBody>
+            <a:bodyPr rtlCol="0" anchor="ctr"/>
+            <a:lstStyle/>
+            <a:p>
+              <a:pPr algn="ctr"/>
+            </a:p>
+          </p:txBody>
+        </p:sp>
+        <p:sp>
+          <p:nvSpPr>
+            <p:cNvPr id="154" name="TextBox 153"/>
+            <p:cNvSpPr txBox="1"/>
+            <p:nvPr/>
+          </p:nvSpPr>
+          <p:spPr>
+            <a:xfrm>
+              <a:off x="15060167" y="4034790"/>
+              <a:ext cx="365760" cy="274320"/>
+            </a:xfrm>
+            <a:prstGeom prst="rect">
+              <a:avLst/>
+            </a:prstGeom>
+            <a:noFill/>
+          </p:spPr>
+          <p:txBody>
+            <a:bodyPr wrap="none" anchor="ctr" lIns="0" rIns="0" tIns="0" bIns="0">
+              <a:noAutofit/>
+            </a:bodyPr>
+            <a:lstStyle/>
+            <a:p>
+              <a:pPr algn="ctr"/>
+              <a:r>
+                <a:rPr sz="1600" b="1">
+                  <a:solidFill>
+                    <a:srgbClr val="FFFFFF"/>
+                  </a:solidFill>
+                  <a:latin typeface="Arial"/>
+                  <a:ea typeface="Arial"/>
+                </a:rPr>
+                <a:t>P2</a:t>
+              </a:r>
+            </a:p>
+          </p:txBody>
+        </p:sp>
+        <p:sp>
+          <p:nvSpPr>
+            <p:cNvPr id="155" name="TextBox 154"/>
+            <p:cNvSpPr txBox="1"/>
+            <p:nvPr/>
+          </p:nvSpPr>
+          <p:spPr>
+            <a:xfrm>
+              <a:off x="15736824" y="4034790"/>
+              <a:ext cx="868680" cy="274320"/>
+            </a:xfrm>
+            <a:prstGeom prst="rect">
+              <a:avLst/>
+            </a:prstGeom>
+            <a:noFill/>
+          </p:spPr>
+          <p:txBody>
+            <a:bodyPr wrap="none" anchor="ctr" lIns="0" rIns="0" tIns="0" bIns="0">
+              <a:noAutofit/>
+            </a:bodyPr>
+            <a:lstStyle/>
+            <a:p>
+              <a:pPr algn="l"/>
+              <a:r>
+                <a:rPr sz="1600" b="1">
+                  <a:solidFill>
+                    <a:srgbClr val="6E56B0"/>
+                  </a:solidFill>
+                  <a:latin typeface="Arial"/>
+                  <a:ea typeface="Arial"/>
+                </a:rPr>
+                <a:t>부품 공용</a:t>
+              </a:r>
+            </a:p>
+          </p:txBody>
+        </p:sp>
+        <p:cxnSp>
+          <p:nvCxnSpPr>
+            <p:cNvPr id="156" name="Connector 155"/>
+            <p:cNvCxnSpPr/>
+            <p:nvPr/>
+          </p:nvCxnSpPr>
+          <p:spPr>
+            <a:xfrm>
+              <a:off x="12298680" y="4325112"/>
+              <a:ext cx="4809744" cy="0"/>
+            </a:xfrm>
+            <a:prstGeom prst="line">
+              <a:avLst/>
+            </a:prstGeom>
+            <a:ln w="8890">
+              <a:solidFill>
+                <a:srgbClr val="D9D9D9"/>
+              </a:solidFill>
+            </a:ln>
+          </p:spPr>
+        </p:cxnSp>
+        <p:sp>
+          <p:nvSpPr>
+            <p:cNvPr id="157" name="TextBox 156"/>
+            <p:cNvSpPr txBox="1"/>
+            <p:nvPr/>
+          </p:nvSpPr>
+          <p:spPr>
+            <a:xfrm>
+              <a:off x="12298680" y="4341114"/>
+              <a:ext cx="630936" cy="274320"/>
+            </a:xfrm>
+            <a:prstGeom prst="rect">
+              <a:avLst/>
+            </a:prstGeom>
+            <a:noFill/>
+          </p:spPr>
+          <p:txBody>
+            <a:bodyPr wrap="none" anchor="ctr" lIns="0" rIns="0" tIns="0" bIns="0">
+              <a:noAutofit/>
+            </a:bodyPr>
+            <a:lstStyle/>
+            <a:p>
+              <a:pPr algn="l"/>
+              <a:r>
+                <a:rPr sz="1600" b="1">
+                  <a:solidFill>
+                    <a:srgbClr val="1A1A1A"/>
+                  </a:solidFill>
+                  <a:latin typeface="Arial"/>
+                  <a:ea typeface="Arial"/>
+                </a:rPr>
+                <a:t>CMP</a:t>
+              </a:r>
+            </a:p>
+          </p:txBody>
+        </p:sp>
+        <p:sp>
+          <p:nvSpPr>
+            <p:cNvPr id="158" name="Rounded Rectangle 157"/>
+            <p:cNvSpPr/>
+            <p:nvPr/>
+          </p:nvSpPr>
+          <p:spPr>
+            <a:xfrm>
+              <a:off x="12883896" y="4363974"/>
+              <a:ext cx="365760" cy="228600"/>
+            </a:xfrm>
+            <a:prstGeom prst="roundRect">
+              <a:avLst>
+                <a:gd name="adj" fmla="val 16000"/>
+              </a:avLst>
+            </a:prstGeom>
+            <a:solidFill>
+              <a:srgbClr val="E9ECF8"/>
+            </a:solidFill>
+            <a:ln w="11430">
+              <a:solidFill>
+                <a:srgbClr val="3C4FA5"/>
+              </a:solidFill>
+            </a:ln>
+            <a:effectLst/>
+          </p:spPr>
+          <p:txBody>
+            <a:bodyPr rtlCol="0" anchor="ctr"/>
+            <a:lstStyle/>
+            <a:p>
+              <a:pPr algn="ctr"/>
+            </a:p>
+          </p:txBody>
+        </p:sp>
+        <p:sp>
+          <p:nvSpPr>
+            <p:cNvPr id="159" name="TextBox 158"/>
+            <p:cNvSpPr txBox="1"/>
+            <p:nvPr/>
+          </p:nvSpPr>
+          <p:spPr>
+            <a:xfrm>
+              <a:off x="12883896" y="4341114"/>
+              <a:ext cx="365760" cy="274320"/>
+            </a:xfrm>
+            <a:prstGeom prst="rect">
+              <a:avLst/>
+            </a:prstGeom>
+            <a:noFill/>
+          </p:spPr>
+          <p:txBody>
+            <a:bodyPr wrap="none" anchor="ctr" lIns="0" rIns="0" tIns="0" bIns="0">
+              <a:noAutofit/>
+            </a:bodyPr>
+            <a:lstStyle/>
+            <a:p>
+              <a:pPr algn="ctr"/>
+              <a:r>
+                <a:rPr sz="1600" b="0">
+                  <a:solidFill>
+                    <a:srgbClr val="3C4FA5"/>
+                  </a:solidFill>
+                  <a:latin typeface="Arial"/>
+                  <a:ea typeface="Arial"/>
+                </a:rPr>
+                <a:t>E1</a:t>
+              </a:r>
+            </a:p>
+          </p:txBody>
+        </p:sp>
+        <p:sp>
+          <p:nvSpPr>
+            <p:cNvPr id="160" name="Rounded Rectangle 159"/>
+            <p:cNvSpPr/>
+            <p:nvPr/>
+          </p:nvSpPr>
+          <p:spPr>
+            <a:xfrm>
+              <a:off x="13295376" y="4363974"/>
+              <a:ext cx="365760" cy="228600"/>
+            </a:xfrm>
+            <a:prstGeom prst="roundRect">
+              <a:avLst>
+                <a:gd name="adj" fmla="val 16000"/>
+              </a:avLst>
+            </a:prstGeom>
+            <a:solidFill>
+              <a:srgbClr val="E9ECF8"/>
+            </a:solidFill>
+            <a:ln w="11430">
+              <a:solidFill>
+                <a:srgbClr val="3C4FA5"/>
+              </a:solidFill>
+            </a:ln>
+            <a:effectLst/>
+          </p:spPr>
+          <p:txBody>
+            <a:bodyPr rtlCol="0" anchor="ctr"/>
+            <a:lstStyle/>
+            <a:p>
+              <a:pPr algn="ctr"/>
+            </a:p>
+          </p:txBody>
+        </p:sp>
+        <p:sp>
+          <p:nvSpPr>
+            <p:cNvPr id="161" name="TextBox 160"/>
+            <p:cNvSpPr txBox="1"/>
+            <p:nvPr/>
+          </p:nvSpPr>
+          <p:spPr>
+            <a:xfrm>
+              <a:off x="13295376" y="4341114"/>
+              <a:ext cx="365760" cy="274320"/>
+            </a:xfrm>
+            <a:prstGeom prst="rect">
+              <a:avLst/>
+            </a:prstGeom>
+            <a:noFill/>
+          </p:spPr>
+          <p:txBody>
+            <a:bodyPr wrap="none" anchor="ctr" lIns="0" rIns="0" tIns="0" bIns="0">
+              <a:noAutofit/>
+            </a:bodyPr>
+            <a:lstStyle/>
+            <a:p>
+              <a:pPr algn="ctr"/>
+              <a:r>
+                <a:rPr sz="1600" b="0">
+                  <a:solidFill>
+                    <a:srgbClr val="3C4FA5"/>
+                  </a:solidFill>
+                  <a:latin typeface="Arial"/>
+                  <a:ea typeface="Arial"/>
+                </a:rPr>
+                <a:t>F5</a:t>
+              </a:r>
+            </a:p>
+          </p:txBody>
+        </p:sp>
+        <p:sp>
+          <p:nvSpPr>
+            <p:cNvPr id="162" name="Rounded Rectangle 161"/>
+            <p:cNvSpPr/>
+            <p:nvPr/>
+          </p:nvSpPr>
+          <p:spPr>
+            <a:xfrm>
+              <a:off x="13761720" y="4363974"/>
+              <a:ext cx="365760" cy="228600"/>
+            </a:xfrm>
+            <a:prstGeom prst="roundRect">
+              <a:avLst>
+                <a:gd name="adj" fmla="val 16000"/>
+              </a:avLst>
+            </a:prstGeom>
+            <a:solidFill>
+              <a:srgbClr val="E3F3F1"/>
+            </a:solidFill>
+            <a:ln w="11430">
+              <a:solidFill>
+                <a:srgbClr val="1E8C8C"/>
+              </a:solidFill>
+            </a:ln>
+            <a:effectLst/>
+          </p:spPr>
+          <p:txBody>
+            <a:bodyPr rtlCol="0" anchor="ctr"/>
+            <a:lstStyle/>
+            <a:p>
+              <a:pPr algn="ctr"/>
+            </a:p>
+          </p:txBody>
+        </p:sp>
+        <p:sp>
+          <p:nvSpPr>
+            <p:cNvPr id="163" name="TextBox 162"/>
+            <p:cNvSpPr txBox="1"/>
+            <p:nvPr/>
+          </p:nvSpPr>
+          <p:spPr>
+            <a:xfrm>
+              <a:off x="13761720" y="4341114"/>
+              <a:ext cx="365760" cy="274320"/>
+            </a:xfrm>
+            <a:prstGeom prst="rect">
+              <a:avLst/>
+            </a:prstGeom>
+            <a:noFill/>
+          </p:spPr>
+          <p:txBody>
+            <a:bodyPr wrap="none" anchor="ctr" lIns="0" rIns="0" tIns="0" bIns="0">
+              <a:noAutofit/>
+            </a:bodyPr>
+            <a:lstStyle/>
+            <a:p>
+              <a:pPr algn="ctr"/>
+              <a:r>
+                <a:rPr sz="1600" b="0">
+                  <a:solidFill>
+                    <a:srgbClr val="146B6B"/>
+                  </a:solidFill>
+                  <a:latin typeface="Arial"/>
+                  <a:ea typeface="Arial"/>
+                </a:rPr>
+                <a:t>M4</a:t>
+              </a:r>
+            </a:p>
+          </p:txBody>
+        </p:sp>
+        <p:sp>
+          <p:nvSpPr>
+            <p:cNvPr id="164" name="Rounded Rectangle 163"/>
+            <p:cNvSpPr/>
+            <p:nvPr/>
+          </p:nvSpPr>
+          <p:spPr>
+            <a:xfrm>
+              <a:off x="14173200" y="4363974"/>
+              <a:ext cx="365760" cy="228600"/>
+            </a:xfrm>
+            <a:prstGeom prst="roundRect">
+              <a:avLst>
+                <a:gd name="adj" fmla="val 16000"/>
+              </a:avLst>
+            </a:prstGeom>
+            <a:solidFill>
+              <a:srgbClr val="E3F3F1"/>
+            </a:solidFill>
+            <a:ln w="11430">
+              <a:solidFill>
+                <a:srgbClr val="1E8C8C"/>
+              </a:solidFill>
+            </a:ln>
+            <a:effectLst/>
+          </p:spPr>
+          <p:txBody>
+            <a:bodyPr rtlCol="0" anchor="ctr"/>
+            <a:lstStyle/>
+            <a:p>
+              <a:pPr algn="ctr"/>
+            </a:p>
+          </p:txBody>
+        </p:sp>
+        <p:sp>
+          <p:nvSpPr>
+            <p:cNvPr id="165" name="TextBox 164"/>
+            <p:cNvSpPr txBox="1"/>
+            <p:nvPr/>
+          </p:nvSpPr>
+          <p:spPr>
+            <a:xfrm>
+              <a:off x="14173200" y="4341114"/>
+              <a:ext cx="365760" cy="274320"/>
+            </a:xfrm>
+            <a:prstGeom prst="rect">
+              <a:avLst/>
+            </a:prstGeom>
+            <a:noFill/>
+          </p:spPr>
+          <p:txBody>
+            <a:bodyPr wrap="none" anchor="ctr" lIns="0" rIns="0" tIns="0" bIns="0">
+              <a:noAutofit/>
+            </a:bodyPr>
+            <a:lstStyle/>
+            <a:p>
+              <a:pPr algn="ctr"/>
+              <a:r>
+                <a:rPr sz="1600" b="0">
+                  <a:solidFill>
+                    <a:srgbClr val="146B6B"/>
+                  </a:solidFill>
+                  <a:latin typeface="Arial"/>
+                  <a:ea typeface="Arial"/>
+                </a:rPr>
+                <a:t>E2</a:t>
+              </a:r>
+            </a:p>
+          </p:txBody>
+        </p:sp>
+        <p:sp>
+          <p:nvSpPr>
+            <p:cNvPr id="166" name="Right Arrow 165"/>
+            <p:cNvSpPr/>
+            <p:nvPr/>
+          </p:nvSpPr>
+          <p:spPr>
+            <a:xfrm>
+              <a:off x="14639543" y="4386834"/>
+              <a:ext cx="329184" cy="182880"/>
+            </a:xfrm>
+            <a:prstGeom prst="rightArrow">
+              <a:avLst/>
+            </a:prstGeom>
+            <a:solidFill>
+              <a:srgbClr val="D3CAEE"/>
+            </a:solidFill>
+            <a:ln>
+              <a:noFill/>
+            </a:ln>
+            <a:effectLst/>
+          </p:spPr>
+          <p:txBody>
+            <a:bodyPr rtlCol="0" anchor="ctr"/>
+            <a:lstStyle/>
+            <a:p>
+              <a:pPr algn="ctr"/>
+            </a:p>
+          </p:txBody>
+        </p:sp>
+        <p:sp>
+          <p:nvSpPr>
+            <p:cNvPr id="167" name="Rounded Rectangle 166"/>
+            <p:cNvSpPr/>
+            <p:nvPr/>
+          </p:nvSpPr>
+          <p:spPr>
+            <a:xfrm>
+              <a:off x="15169896" y="4299966"/>
+              <a:ext cx="365760" cy="228600"/>
+            </a:xfrm>
+            <a:prstGeom prst="roundRect">
+              <a:avLst>
+                <a:gd name="adj" fmla="val 16000"/>
+              </a:avLst>
+            </a:prstGeom>
+            <a:solidFill>
+              <a:srgbClr val="D3CAEE"/>
+            </a:solidFill>
+            <a:ln w="10160">
+              <a:solidFill>
+                <a:srgbClr val="FFFFFF"/>
+              </a:solidFill>
+            </a:ln>
+            <a:effectLst/>
+          </p:spPr>
+          <p:txBody>
+            <a:bodyPr rtlCol="0" anchor="ctr"/>
+            <a:lstStyle/>
+            <a:p>
+              <a:pPr algn="ctr"/>
+            </a:p>
+          </p:txBody>
+        </p:sp>
+        <p:sp>
+          <p:nvSpPr>
+            <p:cNvPr id="168" name="Rounded Rectangle 167"/>
+            <p:cNvSpPr/>
+            <p:nvPr/>
+          </p:nvSpPr>
+          <p:spPr>
+            <a:xfrm>
+              <a:off x="15115032" y="4331970"/>
+              <a:ext cx="365760" cy="228600"/>
+            </a:xfrm>
+            <a:prstGeom prst="roundRect">
+              <a:avLst>
+                <a:gd name="adj" fmla="val 16000"/>
+              </a:avLst>
+            </a:prstGeom>
+            <a:solidFill>
+              <a:srgbClr val="A797D6"/>
+            </a:solidFill>
+            <a:ln w="10160">
+              <a:solidFill>
+                <a:srgbClr val="FFFFFF"/>
+              </a:solidFill>
+            </a:ln>
+            <a:effectLst/>
+          </p:spPr>
+          <p:txBody>
+            <a:bodyPr rtlCol="0" anchor="ctr"/>
+            <a:lstStyle/>
+            <a:p>
+              <a:pPr algn="ctr"/>
+            </a:p>
+          </p:txBody>
+        </p:sp>
+        <p:sp>
+          <p:nvSpPr>
+            <p:cNvPr id="169" name="Rounded Rectangle 168"/>
+            <p:cNvSpPr/>
+            <p:nvPr/>
+          </p:nvSpPr>
+          <p:spPr>
+            <a:xfrm>
+              <a:off x="15060167" y="4363974"/>
+              <a:ext cx="365760" cy="228600"/>
+            </a:xfrm>
+            <a:prstGeom prst="roundRect">
+              <a:avLst>
+                <a:gd name="adj" fmla="val 16000"/>
+              </a:avLst>
+            </a:prstGeom>
+            <a:solidFill>
+              <a:srgbClr val="6E56B0"/>
+            </a:solidFill>
+            <a:ln w="11430">
+              <a:solidFill>
+                <a:srgbClr val="FFFFFF"/>
+              </a:solidFill>
+            </a:ln>
+            <a:effectLst/>
+          </p:spPr>
+          <p:txBody>
+            <a:bodyPr rtlCol="0" anchor="ctr"/>
+            <a:lstStyle/>
+            <a:p>
+              <a:pPr algn="ctr"/>
+            </a:p>
+          </p:txBody>
+        </p:sp>
+        <p:sp>
+          <p:nvSpPr>
+            <p:cNvPr id="170" name="TextBox 169"/>
+            <p:cNvSpPr txBox="1"/>
+            <p:nvPr/>
+          </p:nvSpPr>
+          <p:spPr>
+            <a:xfrm>
+              <a:off x="15060167" y="4341114"/>
+              <a:ext cx="365760" cy="274320"/>
+            </a:xfrm>
+            <a:prstGeom prst="rect">
+              <a:avLst/>
+            </a:prstGeom>
+            <a:noFill/>
+          </p:spPr>
+          <p:txBody>
+            <a:bodyPr wrap="none" anchor="ctr" lIns="0" rIns="0" tIns="0" bIns="0">
+              <a:noAutofit/>
+            </a:bodyPr>
+            <a:lstStyle/>
+            <a:p>
+              <a:pPr algn="ctr"/>
+              <a:r>
+                <a:rPr sz="1600" b="1">
+                  <a:solidFill>
+                    <a:srgbClr val="FFFFFF"/>
+                  </a:solidFill>
+                  <a:latin typeface="Arial"/>
+                  <a:ea typeface="Arial"/>
+                </a:rPr>
+                <a:t>P3</a:t>
+              </a:r>
+            </a:p>
+          </p:txBody>
+        </p:sp>
+        <p:sp>
+          <p:nvSpPr>
+            <p:cNvPr id="171" name="TextBox 170"/>
+            <p:cNvSpPr txBox="1"/>
+            <p:nvPr/>
+          </p:nvSpPr>
+          <p:spPr>
+            <a:xfrm>
+              <a:off x="15736824" y="4341114"/>
+              <a:ext cx="868680" cy="274320"/>
+            </a:xfrm>
+            <a:prstGeom prst="rect">
+              <a:avLst/>
+            </a:prstGeom>
+            <a:noFill/>
+          </p:spPr>
+          <p:txBody>
+            <a:bodyPr wrap="none" anchor="ctr" lIns="0" rIns="0" tIns="0" bIns="0">
+              <a:noAutofit/>
+            </a:bodyPr>
+            <a:lstStyle/>
+            <a:p>
+              <a:pPr algn="l"/>
+              <a:r>
+                <a:rPr sz="1600" b="1">
+                  <a:solidFill>
+                    <a:srgbClr val="6E56B0"/>
+                  </a:solidFill>
+                  <a:latin typeface="Arial"/>
+                  <a:ea typeface="Arial"/>
+                </a:rPr>
+                <a:t>물량 집중</a:t>
+              </a:r>
+            </a:p>
+          </p:txBody>
+        </p:sp>
+        <p:cxnSp>
+          <p:nvCxnSpPr>
+            <p:cNvPr id="172" name="Connector 171"/>
+            <p:cNvCxnSpPr/>
+            <p:nvPr/>
+          </p:nvCxnSpPr>
+          <p:spPr>
+            <a:xfrm>
+              <a:off x="12298680" y="4631436"/>
+              <a:ext cx="4809744" cy="0"/>
+            </a:xfrm>
+            <a:prstGeom prst="line">
+              <a:avLst/>
+            </a:prstGeom>
+            <a:ln w="8890">
+              <a:solidFill>
+                <a:srgbClr val="D9D9D9"/>
+              </a:solidFill>
+            </a:ln>
+          </p:spPr>
+        </p:cxnSp>
+        <p:sp>
+          <p:nvSpPr>
+            <p:cNvPr id="173" name="TextBox 172"/>
+            <p:cNvSpPr txBox="1"/>
+            <p:nvPr/>
+          </p:nvSpPr>
+          <p:spPr>
+            <a:xfrm>
+              <a:off x="12298680" y="4647438"/>
+              <a:ext cx="749808" cy="274320"/>
+            </a:xfrm>
+            <a:prstGeom prst="rect">
+              <a:avLst/>
+            </a:prstGeom>
+            <a:noFill/>
+          </p:spPr>
+          <p:txBody>
+            <a:bodyPr wrap="none" anchor="ctr" lIns="0" rIns="0" tIns="0" bIns="0">
+              <a:noAutofit/>
+            </a:bodyPr>
+            <a:lstStyle/>
+            <a:p>
+              <a:pPr algn="l"/>
+              <a:r>
+                <a:rPr sz="1600" b="1">
+                  <a:solidFill>
+                    <a:srgbClr val="1A1A1A"/>
+                  </a:solidFill>
+                  <a:latin typeface="Arial"/>
+                  <a:ea typeface="Arial"/>
+                </a:rPr>
+                <a:t>Bond</a:t>
+              </a:r>
+            </a:p>
+          </p:txBody>
+        </p:sp>
+        <p:sp>
+          <p:nvSpPr>
+            <p:cNvPr id="174" name="Rounded Rectangle 173"/>
+            <p:cNvSpPr/>
+            <p:nvPr/>
+          </p:nvSpPr>
+          <p:spPr>
+            <a:xfrm>
+              <a:off x="12883896" y="4670298"/>
+              <a:ext cx="365760" cy="228600"/>
+            </a:xfrm>
+            <a:prstGeom prst="roundRect">
+              <a:avLst>
+                <a:gd name="adj" fmla="val 16000"/>
+              </a:avLst>
+            </a:prstGeom>
+            <a:solidFill>
+              <a:srgbClr val="E9ECF8"/>
+            </a:solidFill>
+            <a:ln w="11430">
+              <a:solidFill>
+                <a:srgbClr val="3C4FA5"/>
+              </a:solidFill>
+            </a:ln>
+            <a:effectLst/>
+          </p:spPr>
+          <p:txBody>
+            <a:bodyPr rtlCol="0" anchor="ctr"/>
+            <a:lstStyle/>
+            <a:p>
+              <a:pPr algn="ctr"/>
+            </a:p>
+          </p:txBody>
+        </p:sp>
+        <p:sp>
+          <p:nvSpPr>
+            <p:cNvPr id="175" name="TextBox 174"/>
+            <p:cNvSpPr txBox="1"/>
+            <p:nvPr/>
+          </p:nvSpPr>
+          <p:spPr>
+            <a:xfrm>
+              <a:off x="12883896" y="4647438"/>
+              <a:ext cx="365760" cy="274320"/>
+            </a:xfrm>
+            <a:prstGeom prst="rect">
+              <a:avLst/>
+            </a:prstGeom>
+            <a:noFill/>
+          </p:spPr>
+          <p:txBody>
+            <a:bodyPr wrap="none" anchor="ctr" lIns="0" rIns="0" tIns="0" bIns="0">
+              <a:noAutofit/>
+            </a:bodyPr>
+            <a:lstStyle/>
+            <a:p>
+              <a:pPr algn="ctr"/>
+              <a:r>
+                <a:rPr sz="1600" b="0">
+                  <a:solidFill>
+                    <a:srgbClr val="3C4FA5"/>
+                  </a:solidFill>
+                  <a:latin typeface="Arial"/>
+                  <a:ea typeface="Arial"/>
+                </a:rPr>
+                <a:t>G2</a:t>
+              </a:r>
+            </a:p>
+          </p:txBody>
+        </p:sp>
+        <p:sp>
+          <p:nvSpPr>
+            <p:cNvPr id="176" name="Rounded Rectangle 175"/>
+            <p:cNvSpPr/>
+            <p:nvPr/>
+          </p:nvSpPr>
+          <p:spPr>
+            <a:xfrm>
+              <a:off x="13295376" y="4670298"/>
+              <a:ext cx="365760" cy="228600"/>
+            </a:xfrm>
+            <a:prstGeom prst="roundRect">
+              <a:avLst>
+                <a:gd name="adj" fmla="val 16000"/>
+              </a:avLst>
+            </a:prstGeom>
+            <a:solidFill>
+              <a:srgbClr val="E9ECF8"/>
+            </a:solidFill>
+            <a:ln w="11430">
+              <a:solidFill>
+                <a:srgbClr val="3C4FA5"/>
+              </a:solidFill>
+            </a:ln>
+            <a:effectLst/>
+          </p:spPr>
+          <p:txBody>
+            <a:bodyPr rtlCol="0" anchor="ctr"/>
+            <a:lstStyle/>
+            <a:p>
+              <a:pPr algn="ctr"/>
+            </a:p>
+          </p:txBody>
+        </p:sp>
+        <p:sp>
+          <p:nvSpPr>
+            <p:cNvPr id="177" name="TextBox 176"/>
+            <p:cNvSpPr txBox="1"/>
+            <p:nvPr/>
+          </p:nvSpPr>
+          <p:spPr>
+            <a:xfrm>
+              <a:off x="13295376" y="4647438"/>
+              <a:ext cx="365760" cy="274320"/>
+            </a:xfrm>
+            <a:prstGeom prst="rect">
+              <a:avLst/>
+            </a:prstGeom>
+            <a:noFill/>
+          </p:spPr>
+          <p:txBody>
+            <a:bodyPr wrap="none" anchor="ctr" lIns="0" rIns="0" tIns="0" bIns="0">
+              <a:noAutofit/>
+            </a:bodyPr>
+            <a:lstStyle/>
+            <a:p>
+              <a:pPr algn="ctr"/>
+              <a:r>
+                <a:rPr sz="1600" b="0">
+                  <a:solidFill>
+                    <a:srgbClr val="3C4FA5"/>
+                  </a:solidFill>
+                  <a:latin typeface="Arial"/>
+                  <a:ea typeface="Arial"/>
+                </a:rPr>
+                <a:t>H1</a:t>
+              </a:r>
+            </a:p>
+          </p:txBody>
+        </p:sp>
+        <p:sp>
+          <p:nvSpPr>
+            <p:cNvPr id="178" name="Rounded Rectangle 177"/>
+            <p:cNvSpPr/>
+            <p:nvPr/>
+          </p:nvSpPr>
+          <p:spPr>
+            <a:xfrm>
+              <a:off x="13761720" y="4670298"/>
+              <a:ext cx="365760" cy="228600"/>
+            </a:xfrm>
+            <a:prstGeom prst="roundRect">
+              <a:avLst>
+                <a:gd name="adj" fmla="val 16000"/>
+              </a:avLst>
+            </a:prstGeom>
+            <a:solidFill>
+              <a:srgbClr val="E3F3F1"/>
+            </a:solidFill>
+            <a:ln w="11430">
+              <a:solidFill>
+                <a:srgbClr val="1E8C8C"/>
+              </a:solidFill>
+            </a:ln>
+            <a:effectLst/>
+          </p:spPr>
+          <p:txBody>
+            <a:bodyPr rtlCol="0" anchor="ctr"/>
+            <a:lstStyle/>
+            <a:p>
+              <a:pPr algn="ctr"/>
+            </a:p>
+          </p:txBody>
+        </p:sp>
+        <p:sp>
+          <p:nvSpPr>
+            <p:cNvPr id="179" name="TextBox 178"/>
+            <p:cNvSpPr txBox="1"/>
+            <p:nvPr/>
+          </p:nvSpPr>
+          <p:spPr>
+            <a:xfrm>
+              <a:off x="13761720" y="4647438"/>
+              <a:ext cx="365760" cy="274320"/>
+            </a:xfrm>
+            <a:prstGeom prst="rect">
+              <a:avLst/>
+            </a:prstGeom>
+            <a:noFill/>
+          </p:spPr>
+          <p:txBody>
+            <a:bodyPr wrap="none" anchor="ctr" lIns="0" rIns="0" tIns="0" bIns="0">
+              <a:noAutofit/>
+            </a:bodyPr>
+            <a:lstStyle/>
+            <a:p>
+              <a:pPr algn="ctr"/>
+              <a:r>
+                <a:rPr sz="1600" b="0">
+                  <a:solidFill>
+                    <a:srgbClr val="146B6B"/>
+                  </a:solidFill>
+                  <a:latin typeface="Arial"/>
+                  <a:ea typeface="Arial"/>
+                </a:rPr>
+                <a:t>N2</a:t>
+              </a:r>
+            </a:p>
+          </p:txBody>
+        </p:sp>
+        <p:sp>
+          <p:nvSpPr>
+            <p:cNvPr id="180" name="Rounded Rectangle 179"/>
+            <p:cNvSpPr/>
+            <p:nvPr/>
+          </p:nvSpPr>
+          <p:spPr>
+            <a:xfrm>
+              <a:off x="14173200" y="4670298"/>
+              <a:ext cx="365760" cy="228600"/>
+            </a:xfrm>
+            <a:prstGeom prst="roundRect">
+              <a:avLst>
+                <a:gd name="adj" fmla="val 16000"/>
+              </a:avLst>
+            </a:prstGeom>
+            <a:solidFill>
+              <a:srgbClr val="E3F3F1"/>
+            </a:solidFill>
+            <a:ln w="11430">
+              <a:solidFill>
+                <a:srgbClr val="1E8C8C"/>
+              </a:solidFill>
+            </a:ln>
+            <a:effectLst/>
+          </p:spPr>
+          <p:txBody>
+            <a:bodyPr rtlCol="0" anchor="ctr"/>
+            <a:lstStyle/>
+            <a:p>
+              <a:pPr algn="ctr"/>
+            </a:p>
+          </p:txBody>
+        </p:sp>
+        <p:sp>
+          <p:nvSpPr>
+            <p:cNvPr id="181" name="TextBox 180"/>
+            <p:cNvSpPr txBox="1"/>
+            <p:nvPr/>
+          </p:nvSpPr>
+          <p:spPr>
+            <a:xfrm>
+              <a:off x="14173200" y="4647438"/>
+              <a:ext cx="365760" cy="274320"/>
+            </a:xfrm>
+            <a:prstGeom prst="rect">
+              <a:avLst/>
+            </a:prstGeom>
+            <a:noFill/>
+          </p:spPr>
+          <p:txBody>
+            <a:bodyPr wrap="none" anchor="ctr" lIns="0" rIns="0" tIns="0" bIns="0">
+              <a:noAutofit/>
+            </a:bodyPr>
+            <a:lstStyle/>
+            <a:p>
+              <a:pPr algn="ctr"/>
+              <a:r>
+                <a:rPr sz="1600" b="0">
+                  <a:solidFill>
+                    <a:srgbClr val="146B6B"/>
+                  </a:solidFill>
+                  <a:latin typeface="Arial"/>
+                  <a:ea typeface="Arial"/>
+                </a:rPr>
+                <a:t>G7</a:t>
+              </a:r>
+            </a:p>
+          </p:txBody>
+        </p:sp>
+        <p:sp>
+          <p:nvSpPr>
+            <p:cNvPr id="182" name="Right Arrow 181"/>
+            <p:cNvSpPr/>
+            <p:nvPr/>
+          </p:nvSpPr>
+          <p:spPr>
+            <a:xfrm>
+              <a:off x="14639543" y="4693158"/>
+              <a:ext cx="329184" cy="182880"/>
+            </a:xfrm>
+            <a:prstGeom prst="rightArrow">
+              <a:avLst/>
+            </a:prstGeom>
+            <a:solidFill>
+              <a:srgbClr val="D3CAEE"/>
+            </a:solidFill>
+            <a:ln>
+              <a:noFill/>
+            </a:ln>
+            <a:effectLst/>
+          </p:spPr>
+          <p:txBody>
+            <a:bodyPr rtlCol="0" anchor="ctr"/>
+            <a:lstStyle/>
+            <a:p>
+              <a:pPr algn="ctr"/>
+            </a:p>
+          </p:txBody>
+        </p:sp>
+        <p:sp>
+          <p:nvSpPr>
+            <p:cNvPr id="183" name="Rounded Rectangle 182"/>
+            <p:cNvSpPr/>
+            <p:nvPr/>
+          </p:nvSpPr>
+          <p:spPr>
+            <a:xfrm>
+              <a:off x="15169896" y="4606290"/>
+              <a:ext cx="365760" cy="228600"/>
+            </a:xfrm>
+            <a:prstGeom prst="roundRect">
+              <a:avLst>
+                <a:gd name="adj" fmla="val 16000"/>
+              </a:avLst>
+            </a:prstGeom>
+            <a:solidFill>
+              <a:srgbClr val="D3CAEE"/>
+            </a:solidFill>
+            <a:ln w="10160">
+              <a:solidFill>
+                <a:srgbClr val="FFFFFF"/>
+              </a:solidFill>
+            </a:ln>
+            <a:effectLst/>
+          </p:spPr>
+          <p:txBody>
+            <a:bodyPr rtlCol="0" anchor="ctr"/>
+            <a:lstStyle/>
+            <a:p>
+              <a:pPr algn="ctr"/>
+            </a:p>
+          </p:txBody>
+        </p:sp>
+        <p:sp>
+          <p:nvSpPr>
+            <p:cNvPr id="184" name="Rounded Rectangle 183"/>
+            <p:cNvSpPr/>
+            <p:nvPr/>
+          </p:nvSpPr>
+          <p:spPr>
+            <a:xfrm>
+              <a:off x="15115032" y="4638294"/>
+              <a:ext cx="365760" cy="228600"/>
+            </a:xfrm>
+            <a:prstGeom prst="roundRect">
+              <a:avLst>
+                <a:gd name="adj" fmla="val 16000"/>
+              </a:avLst>
+            </a:prstGeom>
+            <a:solidFill>
+              <a:srgbClr val="A797D6"/>
+            </a:solidFill>
+            <a:ln w="10160">
+              <a:solidFill>
+                <a:srgbClr val="FFFFFF"/>
+              </a:solidFill>
+            </a:ln>
+            <a:effectLst/>
+          </p:spPr>
+          <p:txBody>
+            <a:bodyPr rtlCol="0" anchor="ctr"/>
+            <a:lstStyle/>
+            <a:p>
+              <a:pPr algn="ctr"/>
+            </a:p>
+          </p:txBody>
+        </p:sp>
+        <p:sp>
+          <p:nvSpPr>
+            <p:cNvPr id="185" name="Rounded Rectangle 184"/>
+            <p:cNvSpPr/>
+            <p:nvPr/>
+          </p:nvSpPr>
+          <p:spPr>
+            <a:xfrm>
+              <a:off x="15060167" y="4670298"/>
+              <a:ext cx="365760" cy="228600"/>
+            </a:xfrm>
+            <a:prstGeom prst="roundRect">
+              <a:avLst>
+                <a:gd name="adj" fmla="val 16000"/>
+              </a:avLst>
+            </a:prstGeom>
+            <a:solidFill>
+              <a:srgbClr val="6E56B0"/>
+            </a:solidFill>
+            <a:ln w="11430">
+              <a:solidFill>
+                <a:srgbClr val="FFFFFF"/>
+              </a:solidFill>
+            </a:ln>
+            <a:effectLst/>
+          </p:spPr>
+          <p:txBody>
+            <a:bodyPr rtlCol="0" anchor="ctr"/>
+            <a:lstStyle/>
+            <a:p>
+              <a:pPr algn="ctr"/>
+            </a:p>
+          </p:txBody>
+        </p:sp>
+        <p:sp>
+          <p:nvSpPr>
+            <p:cNvPr id="186" name="TextBox 185"/>
+            <p:cNvSpPr txBox="1"/>
+            <p:nvPr/>
+          </p:nvSpPr>
+          <p:spPr>
+            <a:xfrm>
+              <a:off x="15060167" y="4647438"/>
+              <a:ext cx="365760" cy="274320"/>
+            </a:xfrm>
+            <a:prstGeom prst="rect">
+              <a:avLst/>
+            </a:prstGeom>
+            <a:noFill/>
+          </p:spPr>
+          <p:txBody>
+            <a:bodyPr wrap="none" anchor="ctr" lIns="0" rIns="0" tIns="0" bIns="0">
+              <a:noAutofit/>
+            </a:bodyPr>
+            <a:lstStyle/>
+            <a:p>
+              <a:pPr algn="ctr"/>
+              <a:r>
+                <a:rPr sz="1600" b="1">
+                  <a:solidFill>
+                    <a:srgbClr val="FFFFFF"/>
+                  </a:solidFill>
+                  <a:latin typeface="Arial"/>
+                  <a:ea typeface="Arial"/>
+                </a:rPr>
+                <a:t>P4</a:t>
+              </a:r>
+            </a:p>
+          </p:txBody>
+        </p:sp>
+        <p:sp>
+          <p:nvSpPr>
+            <p:cNvPr id="187" name="TextBox 186"/>
+            <p:cNvSpPr txBox="1"/>
+            <p:nvPr/>
+          </p:nvSpPr>
+          <p:spPr>
+            <a:xfrm>
+              <a:off x="15736824" y="4647438"/>
+              <a:ext cx="868680" cy="274320"/>
+            </a:xfrm>
+            <a:prstGeom prst="rect">
+              <a:avLst/>
+            </a:prstGeom>
+            <a:noFill/>
+          </p:spPr>
+          <p:txBody>
+            <a:bodyPr wrap="none" anchor="ctr" lIns="0" rIns="0" tIns="0" bIns="0">
+              <a:noAutofit/>
+            </a:bodyPr>
+            <a:lstStyle/>
+            <a:p>
+              <a:pPr algn="l"/>
+              <a:r>
+                <a:rPr sz="1600" b="1">
+                  <a:solidFill>
+                    <a:srgbClr val="B86E00"/>
+                  </a:solidFill>
+                  <a:latin typeface="Arial"/>
+                  <a:ea typeface="Arial"/>
+                </a:rPr>
+                <a:t>협상력 ↑</a:t>
+              </a:r>
+            </a:p>
+          </p:txBody>
+        </p:sp>
+      </p:grpSp>
+      <p:sp>
+        <p:nvSpPr>
+          <p:cNvPr id="188" name="Rectangle 187"/>
           <p:cNvSpPr/>
           <p:nvPr/>
         </p:nvSpPr>
@@ -30795,7 +35574,7 @@
       </p:sp>
       <p:sp>
         <p:nvSpPr>
-          <p:cNvPr id="39" name="TextBox 38"/>
+          <p:cNvPr id="189" name="TextBox 188"/>
           <p:cNvSpPr txBox="1"/>
           <p:nvPr/>
         </p:nvSpPr>
@@ -30845,7 +35624,7 @@
       </p:sp>
       <p:sp>
         <p:nvSpPr>
-          <p:cNvPr id="40" name="Rectangle 39"/>
+          <p:cNvPr id="190" name="Rectangle 189"/>
           <p:cNvSpPr/>
           <p:nvPr/>
         </p:nvSpPr>
@@ -30877,7 +35656,7 @@
       </p:sp>
       <p:sp>
         <p:nvSpPr>
-          <p:cNvPr id="41" name="TextBox 40"/>
+          <p:cNvPr id="191" name="TextBox 190"/>
           <p:cNvSpPr txBox="1"/>
           <p:nvPr/>
         </p:nvSpPr>
@@ -30927,7 +35706,7 @@
       </p:sp>
       <p:sp>
         <p:nvSpPr>
-          <p:cNvPr id="42" name="Rectangle 41"/>
+          <p:cNvPr id="192" name="Rectangle 191"/>
           <p:cNvSpPr/>
           <p:nvPr/>
         </p:nvSpPr>
@@ -30959,7 +35738,7 @@
       </p:sp>
       <p:sp>
         <p:nvSpPr>
-          <p:cNvPr id="43" name="TextBox 42"/>
+          <p:cNvPr id="193" name="TextBox 192"/>
           <p:cNvSpPr txBox="1"/>
           <p:nvPr/>
         </p:nvSpPr>
@@ -31009,7 +35788,7 @@
       </p:sp>
       <p:sp>
         <p:nvSpPr>
-          <p:cNvPr id="44" name="Rectangle 43"/>
+          <p:cNvPr id="194" name="Rectangle 193"/>
           <p:cNvSpPr/>
           <p:nvPr/>
         </p:nvSpPr>
@@ -31039,7 +35818,7 @@
       </p:sp>
       <p:sp>
         <p:nvSpPr>
-          <p:cNvPr id="45" name="Rectangle 44"/>
+          <p:cNvPr id="195" name="Rectangle 194"/>
           <p:cNvSpPr/>
           <p:nvPr/>
         </p:nvSpPr>
@@ -31069,7 +35848,7 @@
       </p:sp>
       <p:sp>
         <p:nvSpPr>
-          <p:cNvPr id="46" name="Rectangle 45"/>
+          <p:cNvPr id="196" name="Rectangle 195"/>
           <p:cNvSpPr/>
           <p:nvPr/>
         </p:nvSpPr>
@@ -31099,7 +35878,7 @@
       </p:sp>
       <p:sp>
         <p:nvSpPr>
-          <p:cNvPr id="47" name="Rectangle 46"/>
+          <p:cNvPr id="197" name="Rectangle 196"/>
           <p:cNvSpPr/>
           <p:nvPr/>
         </p:nvSpPr>
@@ -31129,7 +35908,7 @@
       </p:sp>
       <p:sp>
         <p:nvSpPr>
-          <p:cNvPr id="48" name="Rectangle 47"/>
+          <p:cNvPr id="198" name="Rectangle 197"/>
           <p:cNvSpPr/>
           <p:nvPr/>
         </p:nvSpPr>
@@ -31159,7 +35938,7 @@
       </p:sp>
       <p:sp>
         <p:nvSpPr>
-          <p:cNvPr id="49" name="Rectangle 48"/>
+          <p:cNvPr id="199" name="Rectangle 198"/>
           <p:cNvSpPr/>
           <p:nvPr/>
         </p:nvSpPr>
@@ -31189,7 +35968,7 @@
       </p:sp>
       <p:sp>
         <p:nvSpPr>
-          <p:cNvPr id="50" name="Rectangle 49"/>
+          <p:cNvPr id="200" name="Rectangle 199"/>
           <p:cNvSpPr/>
           <p:nvPr/>
         </p:nvSpPr>
@@ -31219,7 +35998,7 @@
       </p:sp>
       <p:sp>
         <p:nvSpPr>
-          <p:cNvPr id="51" name="Rectangle 50"/>
+          <p:cNvPr id="201" name="Rectangle 200"/>
           <p:cNvSpPr/>
           <p:nvPr/>
         </p:nvSpPr>
@@ -31249,7 +36028,7 @@
       </p:sp>
       <p:sp>
         <p:nvSpPr>
-          <p:cNvPr id="52" name="Rectangle 51"/>
+          <p:cNvPr id="202" name="Rectangle 201"/>
           <p:cNvSpPr/>
           <p:nvPr/>
         </p:nvSpPr>
@@ -31279,7 +36058,7 @@
       </p:sp>
       <p:sp>
         <p:nvSpPr>
-          <p:cNvPr id="53" name="Rectangle 52"/>
+          <p:cNvPr id="203" name="Rectangle 202"/>
           <p:cNvSpPr/>
           <p:nvPr/>
         </p:nvSpPr>
@@ -31309,7 +36088,7 @@
       </p:sp>
       <p:sp>
         <p:nvSpPr>
-          <p:cNvPr id="54" name="Rectangle 53"/>
+          <p:cNvPr id="204" name="Rectangle 203"/>
           <p:cNvSpPr/>
           <p:nvPr/>
         </p:nvSpPr>
@@ -31339,7 +36118,7 @@
       </p:sp>
       <p:sp>
         <p:nvSpPr>
-          <p:cNvPr id="55" name="Rectangle 54"/>
+          <p:cNvPr id="205" name="Rectangle 204"/>
           <p:cNvSpPr/>
           <p:nvPr/>
         </p:nvSpPr>
@@ -31369,7 +36148,7 @@
       </p:sp>
       <p:sp>
         <p:nvSpPr>
-          <p:cNvPr id="56" name="Rectangle 55"/>
+          <p:cNvPr id="206" name="Rectangle 205"/>
           <p:cNvSpPr/>
           <p:nvPr/>
         </p:nvSpPr>
@@ -31399,7 +36178,7 @@
       </p:sp>
       <p:sp>
         <p:nvSpPr>
-          <p:cNvPr id="57" name="Rectangle 56"/>
+          <p:cNvPr id="207" name="Rectangle 206"/>
           <p:cNvSpPr/>
           <p:nvPr/>
         </p:nvSpPr>
@@ -31429,7 +36208,7 @@
       </p:sp>
       <p:sp>
         <p:nvSpPr>
-          <p:cNvPr id="58" name="Rectangle 57"/>
+          <p:cNvPr id="208" name="Rectangle 207"/>
           <p:cNvSpPr/>
           <p:nvPr/>
         </p:nvSpPr>
@@ -31459,7 +36238,7 @@
       </p:sp>
       <p:sp>
         <p:nvSpPr>
-          <p:cNvPr id="59" name="Rectangle 58"/>
+          <p:cNvPr id="209" name="Rectangle 208"/>
           <p:cNvSpPr/>
           <p:nvPr/>
         </p:nvSpPr>
@@ -31489,7 +36268,7 @@
       </p:sp>
       <p:sp>
         <p:nvSpPr>
-          <p:cNvPr id="60" name="Rectangle 59"/>
+          <p:cNvPr id="210" name="Rectangle 209"/>
           <p:cNvSpPr/>
           <p:nvPr/>
         </p:nvSpPr>
@@ -31519,7 +36298,7 @@
       </p:sp>
       <p:sp>
         <p:nvSpPr>
-          <p:cNvPr id="61" name="Rectangle 60"/>
+          <p:cNvPr id="211" name="Rectangle 210"/>
           <p:cNvSpPr/>
           <p:nvPr/>
         </p:nvSpPr>
@@ -31549,7 +36328,7 @@
       </p:sp>
       <p:sp>
         <p:nvSpPr>
-          <p:cNvPr id="62" name="Rectangle 61"/>
+          <p:cNvPr id="212" name="Rectangle 211"/>
           <p:cNvSpPr/>
           <p:nvPr/>
         </p:nvSpPr>
@@ -31579,7 +36358,7 @@
       </p:sp>
       <p:sp>
         <p:nvSpPr>
-          <p:cNvPr id="63" name="Rectangle 62"/>
+          <p:cNvPr id="213" name="Rectangle 212"/>
           <p:cNvSpPr/>
           <p:nvPr/>
         </p:nvSpPr>
@@ -31609,7 +36388,7 @@
       </p:sp>
       <p:sp>
         <p:nvSpPr>
-          <p:cNvPr id="64" name="Rectangle 63"/>
+          <p:cNvPr id="214" name="Rectangle 213"/>
           <p:cNvSpPr/>
           <p:nvPr/>
         </p:nvSpPr>
@@ -31639,7 +36418,7 @@
       </p:sp>
       <p:sp>
         <p:nvSpPr>
-          <p:cNvPr id="65" name="Rectangle 64"/>
+          <p:cNvPr id="215" name="Rectangle 214"/>
           <p:cNvSpPr/>
           <p:nvPr/>
         </p:nvSpPr>
@@ -31669,7 +36448,7 @@
       </p:sp>
       <p:sp>
         <p:nvSpPr>
-          <p:cNvPr id="66" name="Rectangle 65"/>
+          <p:cNvPr id="216" name="Rectangle 215"/>
           <p:cNvSpPr/>
           <p:nvPr/>
         </p:nvSpPr>
@@ -31699,7 +36478,7 @@
       </p:sp>
       <p:sp>
         <p:nvSpPr>
-          <p:cNvPr id="67" name="Rectangle 66"/>
+          <p:cNvPr id="217" name="Rectangle 216"/>
           <p:cNvSpPr/>
           <p:nvPr/>
         </p:nvSpPr>
@@ -31729,7 +36508,7 @@
       </p:sp>
       <p:sp>
         <p:nvSpPr>
-          <p:cNvPr id="68" name="Rectangle 67"/>
+          <p:cNvPr id="218" name="Rectangle 217"/>
           <p:cNvSpPr/>
           <p:nvPr/>
         </p:nvSpPr>
@@ -31759,7 +36538,7 @@
       </p:sp>
       <p:sp>
         <p:nvSpPr>
-          <p:cNvPr id="69" name="Rectangle 68"/>
+          <p:cNvPr id="219" name="Rectangle 218"/>
           <p:cNvSpPr/>
           <p:nvPr/>
         </p:nvSpPr>
@@ -31789,7 +36568,7 @@
       </p:sp>
       <p:sp>
         <p:nvSpPr>
-          <p:cNvPr id="70" name="Rectangle 69"/>
+          <p:cNvPr id="220" name="Rectangle 219"/>
           <p:cNvSpPr/>
           <p:nvPr/>
         </p:nvSpPr>
@@ -31819,7 +36598,7 @@
       </p:sp>
       <p:sp>
         <p:nvSpPr>
-          <p:cNvPr id="71" name="Rectangle 70"/>
+          <p:cNvPr id="221" name="Rectangle 220"/>
           <p:cNvSpPr/>
           <p:nvPr/>
         </p:nvSpPr>
@@ -31849,7 +36628,7 @@
       </p:sp>
       <p:sp>
         <p:nvSpPr>
-          <p:cNvPr id="72" name="Rectangle 71"/>
+          <p:cNvPr id="222" name="Rectangle 221"/>
           <p:cNvSpPr/>
           <p:nvPr/>
         </p:nvSpPr>
@@ -31879,7 +36658,7 @@
       </p:sp>
       <p:sp>
         <p:nvSpPr>
-          <p:cNvPr id="73" name="Rectangle 72"/>
+          <p:cNvPr id="223" name="Rectangle 222"/>
           <p:cNvSpPr/>
           <p:nvPr/>
         </p:nvSpPr>
@@ -31909,7 +36688,7 @@
       </p:sp>
       <p:sp>
         <p:nvSpPr>
-          <p:cNvPr id="74" name="Rectangle 73"/>
+          <p:cNvPr id="224" name="Rectangle 223"/>
           <p:cNvSpPr/>
           <p:nvPr/>
         </p:nvSpPr>
@@ -31939,7 +36718,7 @@
       </p:sp>
       <p:sp>
         <p:nvSpPr>
-          <p:cNvPr id="75" name="Rectangle 74"/>
+          <p:cNvPr id="225" name="Rectangle 224"/>
           <p:cNvSpPr/>
           <p:nvPr/>
         </p:nvSpPr>
@@ -31969,7 +36748,7 @@
       </p:sp>
       <p:sp>
         <p:nvSpPr>
-          <p:cNvPr id="76" name="Rectangle 75"/>
+          <p:cNvPr id="226" name="Rectangle 225"/>
           <p:cNvSpPr/>
           <p:nvPr/>
         </p:nvSpPr>
@@ -31999,7 +36778,7 @@
       </p:sp>
       <p:sp>
         <p:nvSpPr>
-          <p:cNvPr id="77" name="Rectangle 76"/>
+          <p:cNvPr id="227" name="Rectangle 226"/>
           <p:cNvSpPr/>
           <p:nvPr/>
         </p:nvSpPr>
@@ -32029,7 +36808,7 @@
       </p:sp>
       <p:sp>
         <p:nvSpPr>
-          <p:cNvPr id="78" name="Rectangle 77"/>
+          <p:cNvPr id="228" name="Rectangle 227"/>
           <p:cNvSpPr/>
           <p:nvPr/>
         </p:nvSpPr>
@@ -32059,7 +36838,7 @@
       </p:sp>
       <p:sp>
         <p:nvSpPr>
-          <p:cNvPr id="79" name="Rectangle 78"/>
+          <p:cNvPr id="229" name="Rectangle 228"/>
           <p:cNvSpPr/>
           <p:nvPr/>
         </p:nvSpPr>
@@ -32089,7 +36868,7 @@
       </p:sp>
       <p:sp>
         <p:nvSpPr>
-          <p:cNvPr id="80" name="Rectangle 79"/>
+          <p:cNvPr id="230" name="Rectangle 229"/>
           <p:cNvSpPr/>
           <p:nvPr/>
         </p:nvSpPr>
@@ -32119,7 +36898,7 @@
       </p:sp>
       <p:sp>
         <p:nvSpPr>
-          <p:cNvPr id="81" name="Rectangle 80"/>
+          <p:cNvPr id="231" name="Rectangle 230"/>
           <p:cNvSpPr/>
           <p:nvPr/>
         </p:nvSpPr>
@@ -32149,7 +36928,7 @@
       </p:sp>
       <p:sp>
         <p:nvSpPr>
-          <p:cNvPr id="82" name="Rectangle 81"/>
+          <p:cNvPr id="232" name="Rectangle 231"/>
           <p:cNvSpPr/>
           <p:nvPr/>
         </p:nvSpPr>
@@ -32179,7 +36958,7 @@
       </p:sp>
       <p:sp>
         <p:nvSpPr>
-          <p:cNvPr id="83" name="Rectangle 82"/>
+          <p:cNvPr id="233" name="Rectangle 232"/>
           <p:cNvSpPr/>
           <p:nvPr/>
         </p:nvSpPr>
@@ -32209,7 +36988,7 @@
       </p:sp>
       <p:sp>
         <p:nvSpPr>
-          <p:cNvPr id="84" name="Rectangle 83"/>
+          <p:cNvPr id="234" name="Rectangle 233"/>
           <p:cNvSpPr/>
           <p:nvPr/>
         </p:nvSpPr>
@@ -32239,7 +37018,7 @@
       </p:sp>
       <p:sp>
         <p:nvSpPr>
-          <p:cNvPr id="85" name="Rectangle 84"/>
+          <p:cNvPr id="235" name="Rectangle 234"/>
           <p:cNvSpPr/>
           <p:nvPr/>
         </p:nvSpPr>
@@ -32269,7 +37048,7 @@
       </p:sp>
       <p:sp>
         <p:nvSpPr>
-          <p:cNvPr id="86" name="Rectangle 85"/>
+          <p:cNvPr id="236" name="Rectangle 235"/>
           <p:cNvSpPr/>
           <p:nvPr/>
         </p:nvSpPr>
@@ -32299,7 +37078,7 @@
       </p:sp>
       <p:sp>
         <p:nvSpPr>
-          <p:cNvPr id="87" name="Rectangle 86"/>
+          <p:cNvPr id="237" name="Rectangle 236"/>
           <p:cNvSpPr/>
           <p:nvPr/>
         </p:nvSpPr>
@@ -32329,7 +37108,7 @@
       </p:sp>
       <p:sp>
         <p:nvSpPr>
-          <p:cNvPr id="88" name="Rectangle 87"/>
+          <p:cNvPr id="238" name="Rectangle 237"/>
           <p:cNvSpPr/>
           <p:nvPr/>
         </p:nvSpPr>
@@ -32359,7 +37138,7 @@
       </p:sp>
       <p:sp>
         <p:nvSpPr>
-          <p:cNvPr id="89" name="TextBox 88"/>
+          <p:cNvPr id="239" name="TextBox 238"/>
           <p:cNvSpPr txBox="1"/>
           <p:nvPr/>
         </p:nvSpPr>
@@ -32409,7 +37188,7 @@
       </p:sp>
       <p:sp>
         <p:nvSpPr>
-          <p:cNvPr id="90" name="Rounded Rectangle 89"/>
+          <p:cNvPr id="240" name="Rounded Rectangle 239"/>
           <p:cNvSpPr/>
           <p:nvPr/>
         </p:nvSpPr>
@@ -32443,7 +37222,7 @@
       </p:sp>
       <p:sp>
         <p:nvSpPr>
-          <p:cNvPr id="91" name="TextBox 90"/>
+          <p:cNvPr id="241" name="TextBox 240"/>
           <p:cNvSpPr txBox="1"/>
           <p:nvPr/>
         </p:nvSpPr>
@@ -32483,7 +37262,7 @@
       </p:sp>
       <p:sp>
         <p:nvSpPr>
-          <p:cNvPr id="92" name="TextBox 91"/>
+          <p:cNvPr id="242" name="TextBox 241"/>
           <p:cNvSpPr txBox="1"/>
           <p:nvPr/>
         </p:nvSpPr>
@@ -32540,7 +37319,7 @@
       </p:sp>
       <p:sp>
         <p:nvSpPr>
-          <p:cNvPr id="93" name="Rounded Rectangle 92"/>
+          <p:cNvPr id="243" name="Rounded Rectangle 242"/>
           <p:cNvSpPr/>
           <p:nvPr/>
         </p:nvSpPr>
@@ -32574,7 +37353,7 @@
       </p:sp>
       <p:sp>
         <p:nvSpPr>
-          <p:cNvPr id="94" name="Oval 93"/>
+          <p:cNvPr id="244" name="Oval 243"/>
           <p:cNvSpPr/>
           <p:nvPr/>
         </p:nvSpPr>
@@ -32604,7 +37383,7 @@
       </p:sp>
       <p:sp>
         <p:nvSpPr>
-          <p:cNvPr id="95" name="Round Same Side Corner Rectangle 94"/>
+          <p:cNvPr id="245" name="Round Same Side Corner Rectangle 244"/>
           <p:cNvSpPr/>
           <p:nvPr/>
         </p:nvSpPr>
@@ -32637,7 +37416,7 @@
       </p:sp>
       <p:sp>
         <p:nvSpPr>
-          <p:cNvPr id="96" name="Oval 95"/>
+          <p:cNvPr id="246" name="Oval 245"/>
           <p:cNvSpPr/>
           <p:nvPr/>
         </p:nvSpPr>
@@ -32667,7 +37446,7 @@
       </p:sp>
       <p:sp>
         <p:nvSpPr>
-          <p:cNvPr id="97" name="Round Same Side Corner Rectangle 96"/>
+          <p:cNvPr id="247" name="Round Same Side Corner Rectangle 246"/>
           <p:cNvSpPr/>
           <p:nvPr/>
         </p:nvSpPr>
@@ -32700,7 +37479,7 @@
       </p:sp>
       <p:sp>
         <p:nvSpPr>
-          <p:cNvPr id="98" name="Oval 97"/>
+          <p:cNvPr id="248" name="Oval 247"/>
           <p:cNvSpPr/>
           <p:nvPr/>
         </p:nvSpPr>
@@ -32730,7 +37509,7 @@
       </p:sp>
       <p:sp>
         <p:nvSpPr>
-          <p:cNvPr id="99" name="Round Same Side Corner Rectangle 98"/>
+          <p:cNvPr id="249" name="Round Same Side Corner Rectangle 248"/>
           <p:cNvSpPr/>
           <p:nvPr/>
         </p:nvSpPr>
@@ -32763,7 +37542,7 @@
       </p:sp>
       <p:sp>
         <p:nvSpPr>
-          <p:cNvPr id="100" name="TextBox 99"/>
+          <p:cNvPr id="250" name="TextBox 249"/>
           <p:cNvSpPr txBox="1"/>
           <p:nvPr/>
         </p:nvSpPr>
@@ -32803,7 +37582,7 @@
       </p:sp>
       <p:sp>
         <p:nvSpPr>
-          <p:cNvPr id="101" name="Rounded Rectangle 100"/>
+          <p:cNvPr id="251" name="Rounded Rectangle 250"/>
           <p:cNvSpPr/>
           <p:nvPr/>
         </p:nvSpPr>
@@ -32837,7 +37616,7 @@
       </p:sp>
       <p:sp>
         <p:nvSpPr>
-          <p:cNvPr id="102" name="Oval 101"/>
+          <p:cNvPr id="252" name="Oval 251"/>
           <p:cNvSpPr/>
           <p:nvPr/>
         </p:nvSpPr>
@@ -32867,7 +37646,7 @@
       </p:sp>
       <p:sp>
         <p:nvSpPr>
-          <p:cNvPr id="103" name="Round Same Side Corner Rectangle 102"/>
+          <p:cNvPr id="253" name="Round Same Side Corner Rectangle 252"/>
           <p:cNvSpPr/>
           <p:nvPr/>
         </p:nvSpPr>
@@ -32900,7 +37679,7 @@
       </p:sp>
       <p:sp>
         <p:nvSpPr>
-          <p:cNvPr id="104" name="Oval 103"/>
+          <p:cNvPr id="254" name="Oval 253"/>
           <p:cNvSpPr/>
           <p:nvPr/>
         </p:nvSpPr>
@@ -32930,7 +37709,7 @@
       </p:sp>
       <p:sp>
         <p:nvSpPr>
-          <p:cNvPr id="105" name="Round Same Side Corner Rectangle 104"/>
+          <p:cNvPr id="255" name="Round Same Side Corner Rectangle 254"/>
           <p:cNvSpPr/>
           <p:nvPr/>
         </p:nvSpPr>
@@ -32963,7 +37742,7 @@
       </p:sp>
       <p:sp>
         <p:nvSpPr>
-          <p:cNvPr id="106" name="Oval 105"/>
+          <p:cNvPr id="256" name="Oval 255"/>
           <p:cNvSpPr/>
           <p:nvPr/>
         </p:nvSpPr>
@@ -32993,7 +37772,7 @@
       </p:sp>
       <p:sp>
         <p:nvSpPr>
-          <p:cNvPr id="107" name="Round Same Side Corner Rectangle 106"/>
+          <p:cNvPr id="257" name="Round Same Side Corner Rectangle 256"/>
           <p:cNvSpPr/>
           <p:nvPr/>
         </p:nvSpPr>
@@ -33026,7 +37805,7 @@
       </p:sp>
       <p:sp>
         <p:nvSpPr>
-          <p:cNvPr id="108" name="TextBox 107"/>
+          <p:cNvPr id="258" name="TextBox 257"/>
           <p:cNvSpPr txBox="1"/>
           <p:nvPr/>
         </p:nvSpPr>
@@ -33066,7 +37845,7 @@
       </p:sp>
       <p:sp>
         <p:nvSpPr>
-          <p:cNvPr id="109" name="Rectangle 108"/>
+          <p:cNvPr id="259" name="Rectangle 258"/>
           <p:cNvSpPr/>
           <p:nvPr/>
         </p:nvSpPr>
@@ -33096,7 +37875,7 @@
       </p:sp>
       <p:sp>
         <p:nvSpPr>
-          <p:cNvPr id="110" name="Rectangle 109"/>
+          <p:cNvPr id="260" name="Rectangle 259"/>
           <p:cNvSpPr/>
           <p:nvPr/>
         </p:nvSpPr>
@@ -33126,7 +37905,7 @@
       </p:sp>
       <p:sp>
         <p:nvSpPr>
-          <p:cNvPr id="111" name="Rectangle 110"/>
+          <p:cNvPr id="261" name="Rectangle 260"/>
           <p:cNvSpPr/>
           <p:nvPr/>
         </p:nvSpPr>
@@ -33156,7 +37935,7 @@
       </p:sp>
       <p:sp>
         <p:nvSpPr>
-          <p:cNvPr id="112" name="Rectangle 111"/>
+          <p:cNvPr id="262" name="Rectangle 261"/>
           <p:cNvSpPr/>
           <p:nvPr/>
         </p:nvSpPr>
@@ -33186,7 +37965,7 @@
       </p:sp>
       <p:sp>
         <p:nvSpPr>
-          <p:cNvPr id="113" name="Rectangle 112"/>
+          <p:cNvPr id="263" name="Rectangle 262"/>
           <p:cNvSpPr/>
           <p:nvPr/>
         </p:nvSpPr>
@@ -33216,7 +37995,7 @@
       </p:sp>
       <p:sp>
         <p:nvSpPr>
-          <p:cNvPr id="114" name="Rectangle 113"/>
+          <p:cNvPr id="264" name="Rectangle 263"/>
           <p:cNvSpPr/>
           <p:nvPr/>
         </p:nvSpPr>
@@ -33246,7 +38025,7 @@
       </p:sp>
       <p:sp>
         <p:nvSpPr>
-          <p:cNvPr id="115" name="Rectangle 114"/>
+          <p:cNvPr id="265" name="Rectangle 264"/>
           <p:cNvSpPr/>
           <p:nvPr/>
         </p:nvSpPr>
@@ -33276,7 +38055,7 @@
       </p:sp>
       <p:sp>
         <p:nvSpPr>
-          <p:cNvPr id="116" name="Rectangle 115"/>
+          <p:cNvPr id="266" name="Rectangle 265"/>
           <p:cNvSpPr/>
           <p:nvPr/>
         </p:nvSpPr>
@@ -33306,7 +38085,7 @@
       </p:sp>
       <p:sp>
         <p:nvSpPr>
-          <p:cNvPr id="117" name="Rectangle 116"/>
+          <p:cNvPr id="267" name="Rectangle 266"/>
           <p:cNvSpPr/>
           <p:nvPr/>
         </p:nvSpPr>
@@ -33336,7 +38115,7 @@
       </p:sp>
       <p:sp>
         <p:nvSpPr>
-          <p:cNvPr id="118" name="Rectangle 117"/>
+          <p:cNvPr id="268" name="Rectangle 267"/>
           <p:cNvSpPr/>
           <p:nvPr/>
         </p:nvSpPr>
@@ -33366,7 +38145,7 @@
       </p:sp>
       <p:sp>
         <p:nvSpPr>
-          <p:cNvPr id="119" name="Rectangle 118"/>
+          <p:cNvPr id="269" name="Rectangle 268"/>
           <p:cNvSpPr/>
           <p:nvPr/>
         </p:nvSpPr>
@@ -33396,7 +38175,7 @@
       </p:sp>
       <p:sp>
         <p:nvSpPr>
-          <p:cNvPr id="120" name="Rectangle 119"/>
+          <p:cNvPr id="270" name="Rectangle 269"/>
           <p:cNvSpPr/>
           <p:nvPr/>
         </p:nvSpPr>
@@ -33426,7 +38205,7 @@
       </p:sp>
       <p:sp>
         <p:nvSpPr>
-          <p:cNvPr id="121" name="TextBox 120"/>
+          <p:cNvPr id="271" name="TextBox 270"/>
           <p:cNvSpPr txBox="1"/>
           <p:nvPr/>
         </p:nvSpPr>
@@ -33466,7 +38245,7 @@
       </p:sp>
       <p:sp>
         <p:nvSpPr>
-          <p:cNvPr id="122" name="Right Arrow 121"/>
+          <p:cNvPr id="272" name="Right Arrow 271"/>
           <p:cNvSpPr/>
           <p:nvPr/>
         </p:nvSpPr>
@@ -33496,7 +38275,7 @@
       </p:sp>
       <p:sp>
         <p:nvSpPr>
-          <p:cNvPr id="123" name="Rounded Rectangle 122"/>
+          <p:cNvPr id="273" name="Rounded Rectangle 272"/>
           <p:cNvSpPr/>
           <p:nvPr/>
         </p:nvSpPr>
@@ -33528,7 +38307,7 @@
       </p:sp>
       <p:sp>
         <p:nvSpPr>
-          <p:cNvPr id="124" name="TextBox 123"/>
+          <p:cNvPr id="274" name="TextBox 273"/>
           <p:cNvSpPr txBox="1"/>
           <p:nvPr/>
         </p:nvSpPr>
@@ -33568,7 +38347,7 @@
       </p:sp>
       <p:sp>
         <p:nvSpPr>
-          <p:cNvPr id="125" name="Oval 124"/>
+          <p:cNvPr id="275" name="Oval 274"/>
           <p:cNvSpPr/>
           <p:nvPr/>
         </p:nvSpPr>
@@ -33598,7 +38377,7 @@
       </p:sp>
       <p:sp>
         <p:nvSpPr>
-          <p:cNvPr id="126" name="Round Same Side Corner Rectangle 125"/>
+          <p:cNvPr id="276" name="Round Same Side Corner Rectangle 275"/>
           <p:cNvSpPr/>
           <p:nvPr/>
         </p:nvSpPr>
@@ -33631,7 +38410,7 @@
       </p:sp>
       <p:sp>
         <p:nvSpPr>
-          <p:cNvPr id="127" name="Oval 126"/>
+          <p:cNvPr id="277" name="Oval 276"/>
           <p:cNvSpPr/>
           <p:nvPr/>
         </p:nvSpPr>
@@ -33661,7 +38440,7 @@
       </p:sp>
       <p:sp>
         <p:nvSpPr>
-          <p:cNvPr id="128" name="Round Same Side Corner Rectangle 127"/>
+          <p:cNvPr id="278" name="Round Same Side Corner Rectangle 277"/>
           <p:cNvSpPr/>
           <p:nvPr/>
         </p:nvSpPr>
@@ -33694,7 +38473,7 @@
       </p:sp>
       <p:sp>
         <p:nvSpPr>
-          <p:cNvPr id="129" name="Oval 128"/>
+          <p:cNvPr id="279" name="Oval 278"/>
           <p:cNvSpPr/>
           <p:nvPr/>
         </p:nvSpPr>
@@ -33724,7 +38503,7 @@
       </p:sp>
       <p:sp>
         <p:nvSpPr>
-          <p:cNvPr id="130" name="Round Same Side Corner Rectangle 129"/>
+          <p:cNvPr id="280" name="Round Same Side Corner Rectangle 279"/>
           <p:cNvSpPr/>
           <p:nvPr/>
         </p:nvSpPr>
@@ -33757,7 +38536,7 @@
       </p:sp>
       <p:sp>
         <p:nvSpPr>
-          <p:cNvPr id="131" name="Oval 130"/>
+          <p:cNvPr id="281" name="Oval 280"/>
           <p:cNvSpPr/>
           <p:nvPr/>
         </p:nvSpPr>
@@ -33787,7 +38566,7 @@
       </p:sp>
       <p:sp>
         <p:nvSpPr>
-          <p:cNvPr id="132" name="Round Same Side Corner Rectangle 131"/>
+          <p:cNvPr id="282" name="Round Same Side Corner Rectangle 281"/>
           <p:cNvSpPr/>
           <p:nvPr/>
         </p:nvSpPr>
@@ -33820,7 +38599,7 @@
       </p:sp>
       <p:sp>
         <p:nvSpPr>
-          <p:cNvPr id="133" name="Oval 132"/>
+          <p:cNvPr id="283" name="Oval 282"/>
           <p:cNvSpPr/>
           <p:nvPr/>
         </p:nvSpPr>
@@ -33850,7 +38629,7 @@
       </p:sp>
       <p:sp>
         <p:nvSpPr>
-          <p:cNvPr id="134" name="Round Same Side Corner Rectangle 133"/>
+          <p:cNvPr id="284" name="Round Same Side Corner Rectangle 283"/>
           <p:cNvSpPr/>
           <p:nvPr/>
         </p:nvSpPr>
@@ -33883,7 +38662,7 @@
       </p:sp>
       <p:sp>
         <p:nvSpPr>
-          <p:cNvPr id="135" name="Oval 134"/>
+          <p:cNvPr id="285" name="Oval 284"/>
           <p:cNvSpPr/>
           <p:nvPr/>
         </p:nvSpPr>
@@ -33913,7 +38692,7 @@
       </p:sp>
       <p:sp>
         <p:nvSpPr>
-          <p:cNvPr id="136" name="Round Same Side Corner Rectangle 135"/>
+          <p:cNvPr id="286" name="Round Same Side Corner Rectangle 285"/>
           <p:cNvSpPr/>
           <p:nvPr/>
         </p:nvSpPr>
@@ -33946,7 +38725,7 @@
       </p:sp>
       <p:sp>
         <p:nvSpPr>
-          <p:cNvPr id="137" name="Rounded Rectangle 136"/>
+          <p:cNvPr id="287" name="Rounded Rectangle 286"/>
           <p:cNvSpPr/>
           <p:nvPr/>
         </p:nvSpPr>
@@ -33980,7 +38759,7 @@
       </p:sp>
       <p:sp>
         <p:nvSpPr>
-          <p:cNvPr id="138" name="TextBox 137"/>
+          <p:cNvPr id="288" name="TextBox 287"/>
           <p:cNvSpPr txBox="1"/>
           <p:nvPr/>
         </p:nvSpPr>
@@ -34020,7 +38799,7 @@
       </p:sp>
       <p:sp>
         <p:nvSpPr>
-          <p:cNvPr id="139" name="Rounded Rectangle 138"/>
+          <p:cNvPr id="289" name="Rounded Rectangle 288"/>
           <p:cNvSpPr/>
           <p:nvPr/>
         </p:nvSpPr>
@@ -34054,7 +38833,7 @@
       </p:sp>
       <p:sp>
         <p:nvSpPr>
-          <p:cNvPr id="140" name="TextBox 139"/>
+          <p:cNvPr id="290" name="TextBox 289"/>
           <p:cNvSpPr txBox="1"/>
           <p:nvPr/>
         </p:nvSpPr>
@@ -34094,7 +38873,7 @@
       </p:sp>
       <p:sp>
         <p:nvSpPr>
-          <p:cNvPr id="141" name="Rounded Rectangle 140"/>
+          <p:cNvPr id="291" name="Rounded Rectangle 290"/>
           <p:cNvSpPr/>
           <p:nvPr/>
         </p:nvSpPr>
@@ -34128,7 +38907,7 @@
       </p:sp>
       <p:sp>
         <p:nvSpPr>
-          <p:cNvPr id="142" name="TextBox 141"/>
+          <p:cNvPr id="292" name="TextBox 291"/>
           <p:cNvSpPr txBox="1"/>
           <p:nvPr/>
         </p:nvSpPr>
@@ -34168,7 +38947,7 @@
       </p:sp>
       <p:sp>
         <p:nvSpPr>
-          <p:cNvPr id="143" name="Up Arrow 142"/>
+          <p:cNvPr id="293" name="Up Arrow 292"/>
           <p:cNvSpPr/>
           <p:nvPr/>
         </p:nvSpPr>
@@ -34198,7 +38977,7 @@
       </p:sp>
       <p:sp>
         <p:nvSpPr>
-          <p:cNvPr id="144" name="Up Arrow 143"/>
+          <p:cNvPr id="294" name="Up Arrow 293"/>
           <p:cNvSpPr/>
           <p:nvPr/>
         </p:nvSpPr>
@@ -34228,7 +39007,7 @@
       </p:sp>
       <p:sp>
         <p:nvSpPr>
-          <p:cNvPr id="145" name="TextBox 144"/>
+          <p:cNvPr id="295" name="TextBox 294"/>
           <p:cNvSpPr txBox="1"/>
           <p:nvPr/>
         </p:nvSpPr>
@@ -34268,7 +39047,7 @@
       </p:sp>
       <p:cxnSp>
         <p:nvCxnSpPr>
-          <p:cNvPr id="146" name="Connector 145"/>
+          <p:cNvPr id="296" name="Connector 295"/>
           <p:cNvCxnSpPr/>
           <p:nvPr/>
         </p:nvCxnSpPr>
@@ -34289,7 +39068,7 @@
       </p:cxnSp>
       <p:sp>
         <p:nvSpPr>
-          <p:cNvPr id="147" name="Rounded Rectangle 146"/>
+          <p:cNvPr id="297" name="Rounded Rectangle 296"/>
           <p:cNvSpPr/>
           <p:nvPr/>
         </p:nvSpPr>
@@ -34323,7 +39102,7 @@
       </p:sp>
       <p:sp>
         <p:nvSpPr>
-          <p:cNvPr id="148" name="TextBox 147"/>
+          <p:cNvPr id="298" name="TextBox 297"/>
           <p:cNvSpPr txBox="1"/>
           <p:nvPr/>
         </p:nvSpPr>
@@ -34397,7 +39176,7 @@
       </p:sp>
       <p:sp>
         <p:nvSpPr>
-          <p:cNvPr id="149" name="TextBox 148"/>
+          <p:cNvPr id="299" name="TextBox 298"/>
           <p:cNvSpPr txBox="1"/>
           <p:nvPr/>
         </p:nvSpPr>
@@ -34437,7 +39216,7 @@
       </p:sp>
       <p:sp>
         <p:nvSpPr>
-          <p:cNvPr id="150" name="TextBox 149"/>
+          <p:cNvPr id="300" name="TextBox 299"/>
           <p:cNvSpPr txBox="1"/>
           <p:nvPr/>
         </p:nvSpPr>
